--- a/lecons/F2T/22_S16_L5_P3_Primary_Sector.pptx
+++ b/lecons/F2T/22_S16_L5_P3_Primary_Sector.pptx
@@ -55,9 +55,10 @@
     <p:sldId id="303" r:id="rId49"/>
     <p:sldId id="304" r:id="rId50"/>
     <p:sldId id="305" r:id="rId51"/>
+    <p:sldId id="306" r:id="rId52"/>
   </p:sldIdLst>
   <p:notesMasterIdLst>
-    <p:notesMasterId r:id="rId52"/>
+    <p:notesMasterId r:id="rId53"/>
   </p:notesMasterIdLst>
   <p:sldSz cx="12192000" cy="6858000"/>
   <p:notesSz cx="6858000" cy="12192000"/>
@@ -727,7 +728,7 @@
           <a:p>
             <a:r>
               <a:rPr lang="en-US" dirty="0"/>
-              <a:t>Good. Rahila wants to know how these products are grouped.</a:t>
+              <a:t>Good. Rahila does not know the name of the sector that takes products from nature.</a:t>
             </a:r>
             <a:endParaRPr lang="en-US" dirty="0"/>
           </a:p>
@@ -815,7 +816,7 @@
           <a:p>
             <a:r>
               <a:rPr lang="en-US" dirty="0"/>
-              <a:t>Question 2: Where does each product come from? Think for a moment, then raise your hand to answer.</a:t>
+              <a:t>Question 2: Where does the fish come from? Think for a moment, then raise your hand to answer.</a:t>
             </a:r>
             <a:endParaRPr lang="en-US" dirty="0"/>
           </a:p>
@@ -903,7 +904,7 @@
           <a:p>
             <a:r>
               <a:rPr lang="en-US" dirty="0"/>
-              <a:t>Good. Maize from Pitoa, fish from Lagdo, beef from Adamawa, wood from the bush.</a:t>
+              <a:t>Good. From the Lagdo lake.</a:t>
             </a:r>
             <a:endParaRPr lang="en-US" dirty="0"/>
           </a:p>
@@ -991,7 +992,7 @@
           <a:p>
             <a:r>
               <a:rPr lang="en-US" dirty="0"/>
-              <a:t>Question 3: What do they have in common? Think for a moment, then raise your hand to answer.</a:t>
+              <a:t>Question 3: Where does the beef come from? Think for a moment, then raise your hand to answer.</a:t>
             </a:r>
             <a:endParaRPr lang="en-US" dirty="0"/>
           </a:p>
@@ -1079,7 +1080,7 @@
           <a:p>
             <a:r>
               <a:rPr lang="en-US" dirty="0"/>
-              <a:t>Good. They are all taken from nature.</a:t>
+              <a:t>Good. From the Adamawa.</a:t>
             </a:r>
             <a:endParaRPr lang="en-US" dirty="0"/>
           </a:p>
@@ -1343,7 +1344,7 @@
           <a:p>
             <a:r>
               <a:rPr lang="en-US" dirty="0"/>
-              <a:t>Activity 1. Look carefully at this picture: a farmer holds a cob of maize. Observe every detail before I ask the question.</a:t>
+              <a:t>Activity 1. Look carefully at this picture: a maize farmer. Observe every detail before I ask the question.</a:t>
             </a:r>
             <a:endParaRPr lang="en-US" dirty="0"/>
           </a:p>
@@ -1783,7 +1784,7 @@
           <a:p>
             <a:r>
               <a:rPr lang="en-US" dirty="0"/>
-              <a:t>Here is the question for Activity 2: Where do most cattle of Cameroon come from? Take one minute to think and write your answer in your rough notebook.</a:t>
+              <a:t>Here is the question for Activity 2: Which region of Cameroon rears many cattle? Take one minute to think and write your answer in your rough notebook.</a:t>
             </a:r>
             <a:endParaRPr lang="en-US" dirty="0"/>
           </a:p>
@@ -1871,7 +1872,7 @@
           <a:p>
             <a:r>
               <a:rPr lang="en-US" dirty="0"/>
-              <a:t>Let us check the answer together. From the North and the Adamawa plateau.</a:t>
+              <a:t>Let us check the answer together. The Adamawa (also the North).</a:t>
             </a:r>
             <a:endParaRPr lang="en-US" dirty="0"/>
           </a:p>
@@ -1959,7 +1960,7 @@
           <a:p>
             <a:r>
               <a:rPr lang="en-US" dirty="0"/>
-              <a:t>Activity 3. Look carefully at this picture: fresh fish for sale. Observe every detail before I ask the question.</a:t>
+              <a:t>Activity 3. Look carefully at this picture: a fish market. Observe every detail before I ask the question.</a:t>
             </a:r>
             <a:endParaRPr lang="en-US" dirty="0"/>
           </a:p>
@@ -2047,7 +2048,7 @@
           <a:p>
             <a:r>
               <a:rPr lang="en-US" dirty="0"/>
-              <a:t>Here is the question for Activity 3: Name two places where people fish in Cameroon. Take one minute to think and write your answer in your rough notebook.</a:t>
+              <a:t>Here is the question for Activity 3: Name one place where people fish in Cameroon. Take one minute to think and write your answer in your rough notebook.</a:t>
             </a:r>
             <a:endParaRPr lang="en-US" dirty="0"/>
           </a:p>
@@ -2135,7 +2136,7 @@
           <a:p>
             <a:r>
               <a:rPr lang="en-US" dirty="0"/>
-              <a:t>Let us check the answer together. The Lagdo lake and the sea at Kribi (also Limbe, Douala).</a:t>
+              <a:t>Let us check the answer together. The Lagdo lake (also the sea at Kribi).</a:t>
             </a:r>
             <a:endParaRPr lang="en-US" dirty="0"/>
           </a:p>
@@ -2223,7 +2224,7 @@
           <a:p>
             <a:r>
               <a:rPr lang="en-US" dirty="0"/>
-              <a:t>Activity 4. Look carefully at this picture: logs from the forest of East Cameroon. Observe every detail before I ask the question.</a:t>
+              <a:t>Activity 4. Look carefully at this picture: logs. Observe every detail before I ask the question.</a:t>
             </a:r>
             <a:endParaRPr lang="en-US" dirty="0"/>
           </a:p>
@@ -2575,7 +2576,7 @@
           <a:p>
             <a:r>
               <a:rPr lang="en-US" dirty="0"/>
-              <a:t>Activity 5. Look carefully at this picture: people dig for gold by hand. Observe every detail before I ask the question.</a:t>
+              <a:t>Activity 5. Look carefully at this picture: people digging. Observe every detail before I ask the question.</a:t>
             </a:r>
             <a:endParaRPr lang="en-US" dirty="0"/>
           </a:p>
@@ -2663,7 +2664,7 @@
           <a:p>
             <a:r>
               <a:rPr lang="en-US" dirty="0"/>
-              <a:t>Here is the question for Activity 5: What are these people taking from the ground? Take one minute to think and write your answer in your rough notebook.</a:t>
+              <a:t>Here is the question for Activity 5: What do we call taking minerals from the ground? Take one minute to think and write your answer in your rough notebook.</a:t>
             </a:r>
             <a:endParaRPr lang="en-US" dirty="0"/>
           </a:p>
@@ -2751,7 +2752,7 @@
           <a:p>
             <a:r>
               <a:rPr lang="en-US" dirty="0"/>
-              <a:t>Let us check the answer together. Gold. Taking minerals from the ground is mining.</a:t>
+              <a:t>Let us check the answer together. Mining.</a:t>
             </a:r>
             <a:endParaRPr lang="en-US" dirty="0"/>
           </a:p>
@@ -3015,7 +3016,7 @@
           <a:p>
             <a:r>
               <a:rPr lang="en-US" dirty="0"/>
-              <a:t>Let us copy Examples of the Primary Sector. The primary sector in Cameroon includes the following activities. On this slide we have Agriculture and Livestock rearing. Write each point on a new line, with the key term first, and explain it in your own words when we revise. When you finish, we go to the next slide.</a:t>
+              <a:t>Let us copy Examples of Primary Activities. The primary sector includes the following activities. Copy the point on Farming on the left, then draw the diagram on the right: a maize farmer. Give it a title and label it clearly.</a:t>
             </a:r>
             <a:endParaRPr lang="en-US" dirty="0"/>
           </a:p>
@@ -3103,7 +3104,7 @@
           <a:p>
             <a:r>
               <a:rPr lang="en-US" dirty="0"/>
-              <a:t>We continue with Examples of the Primary Sector. On this slide we have Fishing, Forestry and Mining. Write each point on a new line, with the key term first, and explain it in your own words when we revise.</a:t>
+              <a:t>Copy the point on Livestock rearing on the left, then draw the diagram on the right: a cattle market. Give it a title and label it clearly.</a:t>
             </a:r>
             <a:endParaRPr lang="en-US" dirty="0"/>
           </a:p>
@@ -3191,7 +3192,7 @@
           <a:p>
             <a:r>
               <a:rPr lang="en-US" dirty="0"/>
-              <a:t>Let us copy Importance of the Primary Sector. The primary sector is important for the following reasons. On this slide we have Food and Jobs. Write each point on a new line, with the key term first, and explain it in your own words when we revise. When you finish, we go to the next slide.</a:t>
+              <a:t>We continue with Examples of Primary Activities. On this slide we have Fishing and Forestry. Write each point on a new line, with the key term first, and explain it in your own words when we revise.</a:t>
             </a:r>
             <a:endParaRPr lang="en-US" dirty="0"/>
           </a:p>
@@ -3279,7 +3280,7 @@
           <a:p>
             <a:r>
               <a:rPr lang="en-US" dirty="0"/>
-              <a:t>We continue with Importance of the Primary Sector. On this slide we have Exports. Write each point on a new line, with the key term first, and explain it in your own words when we revise.</a:t>
+              <a:t>Copy the point on Mining on the left, then draw the diagram on the right: gold mining. Give it a title and label it clearly.</a:t>
             </a:r>
             <a:endParaRPr lang="en-US" dirty="0"/>
           </a:p>
@@ -3367,7 +3368,7 @@
           <a:p>
             <a:r>
               <a:rPr lang="en-US" dirty="0"/>
-              <a:t>Now let us check what you have understood. Question 1: What is the primary sector? Answer in your exercise book.</a:t>
+              <a:t>We continue with Examples of Primary Activities. On this slide we have Hunting and gathering. Write each point on a new line, with the key term first, and explain it in your own words when we revise.</a:t>
             </a:r>
             <a:endParaRPr lang="en-US" dirty="0"/>
           </a:p>
@@ -3543,7 +3544,7 @@
           <a:p>
             <a:r>
               <a:rPr lang="en-US" dirty="0"/>
-              <a:t>The expected answer is: the sector that takes products from nature. If you got it right, well done.</a:t>
+              <a:t>Now let us check what you have understood. Question 1: What is the primary sector? Answer in your exercise book.</a:t>
             </a:r>
             <a:endParaRPr lang="en-US" dirty="0"/>
           </a:p>
@@ -3631,7 +3632,7 @@
           <a:p>
             <a:r>
               <a:rPr lang="en-US" dirty="0"/>
-              <a:t>Now let us check what you have understood. Question 2: Give three primary activities. Answer in your exercise book.</a:t>
+              <a:t>The expected answer is: the sector that takes products from nature. If you got it right, well done.</a:t>
             </a:r>
             <a:endParaRPr lang="en-US" dirty="0"/>
           </a:p>
@@ -3719,7 +3720,7 @@
           <a:p>
             <a:r>
               <a:rPr lang="en-US" dirty="0"/>
-              <a:t>The expected answer is: farming, fishing and mining (also rearing, forestry). If you got it right, well done.</a:t>
+              <a:t>Now let us check what you have understood. Question 2: Give three primary activities. Answer in your exercise book.</a:t>
             </a:r>
             <a:endParaRPr lang="en-US" dirty="0"/>
           </a:p>
@@ -3807,7 +3808,7 @@
           <a:p>
             <a:r>
               <a:rPr lang="en-US" dirty="0"/>
-              <a:t>For those who need more practice, fill in the blanks in your exercise book. The answers are: number 1, primary; number 2, mining; number 3, forestry (lumbering).</a:t>
+              <a:t>The expected answer is: farming, fishing and mining (also rearing, forestry). If you got it right, well done.</a:t>
             </a:r>
             <a:endParaRPr lang="en-US" dirty="0"/>
           </a:p>
@@ -3895,7 +3896,7 @@
           <a:p>
             <a:r>
               <a:rPr lang="en-US" dirty="0"/>
-              <a:t>For your homework: Find the names of two factories in Cameroon, and write what each one produces. We shall correct it at the beginning of our next lesson.</a:t>
+              <a:t>For those who need more practice, fill in the blanks in your exercise book. The answers are: number 1, primary; number 2, mining; number 3, forestry (lumbering).</a:t>
             </a:r>
             <a:endParaRPr lang="en-US" dirty="0"/>
           </a:p>
@@ -3983,7 +3984,7 @@
           <a:p>
             <a:r>
               <a:rPr lang="en-US" dirty="0"/>
-              <a:t>Our next lesson will be on Lesson 5 (Part 4): The Sectors of the Economy: The Secondary Sector (Definition and Examples). Thank you for your attention, and see you next time.</a:t>
+              <a:t>For your homework: Find the names of two factories in Cameroon, and write what each one produces. We shall correct it at the beginning of our next lesson.</a:t>
             </a:r>
             <a:endParaRPr lang="en-US" dirty="0"/>
           </a:p>
@@ -4071,7 +4072,7 @@
           <a:p>
             <a:r>
               <a:rPr lang="en-US" dirty="0"/>
-              <a:t>Let us play the bilingual game. I say a word in English, and you give me the French word. Then we do the reverse.</a:t>
+              <a:t>Our next lesson will be on Lesson 5 (Part 4): The Sectors of the Economy: The Secondary Sector (Definition and Examples). Thank you for your attention, and see you next time.</a:t>
             </a:r>
             <a:endParaRPr lang="en-US" dirty="0"/>
           </a:p>
@@ -4159,7 +4160,7 @@
           <a:p>
             <a:r>
               <a:rPr lang="en-US" dirty="0"/>
-              <a:t>I record this information in the official logbook of the class after the lesson.</a:t>
+              <a:t>Let us play the bilingual game. I say a word in English, and you give me the French word. Then we do the reverse.</a:t>
             </a:r>
             <a:endParaRPr lang="en-US" dirty="0"/>
           </a:p>
@@ -4247,7 +4248,7 @@
           <a:p>
             <a:r>
               <a:rPr lang="en-US" dirty="0"/>
-              <a:t>I complete the second page of the logbook: the matter taught, the evaluation, the homework and the attendance.</a:t>
+              <a:t>I record this information in the official logbook of the class after the lesson.</a:t>
             </a:r>
             <a:endParaRPr lang="en-US" dirty="0"/>
           </a:p>
@@ -4335,7 +4336,7 @@
           <a:p>
             <a:r>
               <a:rPr lang="en-US" dirty="0"/>
-              <a:t>This slide is for me, the teacher: it gives the timing of the lesson and what to do if the projector is not available.</a:t>
+              <a:t>I complete the second page of the logbook: the matter taught, the evaluation, the homework and the attendance.</a:t>
             </a:r>
             <a:endParaRPr lang="en-US" dirty="0"/>
           </a:p>
@@ -4511,7 +4512,7 @@
           <a:p>
             <a:r>
               <a:rPr lang="en-US" dirty="0"/>
-              <a:t>These are the references and picture credits used to prepare this lesson.</a:t>
+              <a:t>This slide is for me, the teacher: it gives the timing of the lesson and what to do if the projector is not available.</a:t>
             </a:r>
             <a:endParaRPr lang="en-US" dirty="0"/>
           </a:p>
@@ -4535,6 +4536,94 @@
             <a:fld id="{F7021451-1387-4CA6-816F-3879F97B5CBC}" type="slidenum">
               <a:rPr lang="en-US"/>
               <a:t>50</a:t>
+            </a:fld>
+            <a:endParaRPr lang="en-US"/>
+          </a:p>
+        </p:txBody>
+      </p:sp>
+    </p:spTree>
+    <p:extLst>
+      <p:ext uri="{BB962C8B-B14F-4D97-AF65-F5344CB8AC3E}">
+        <p14:creationId xmlns:p14="http://schemas.microsoft.com/office/powerpoint/2010/main" val="1024086991"/>
+      </p:ext>
+    </p:extLst>
+  </p:cSld>
+  <p:clrMapOvr>
+    <a:masterClrMapping/>
+  </p:clrMapOvr>
+</p:notes>
+</file>
+
+<file path=ppt/notesSlides/notesSlide51.xml><?xml version="1.0" encoding="utf-8"?>
+<p:notes xmlns:a="http://schemas.openxmlformats.org/drawingml/2006/main" xmlns:r="http://schemas.openxmlformats.org/officeDocument/2006/relationships" xmlns:p="http://schemas.openxmlformats.org/presentationml/2006/main">
+  <p:cSld>
+    <p:spTree>
+      <p:nvGrpSpPr>
+        <p:cNvPr id="1" name=""/>
+        <p:cNvGrpSpPr/>
+        <p:nvPr/>
+      </p:nvGrpSpPr>
+      <p:grpSpPr>
+        <a:xfrm>
+          <a:off x="0" y="0"/>
+          <a:ext cx="0" cy="0"/>
+          <a:chOff x="0" y="0"/>
+          <a:chExt cx="0" cy="0"/>
+        </a:xfrm>
+      </p:grpSpPr>
+      <p:sp>
+        <p:nvSpPr>
+          <p:cNvPr id="2" name="Slide Image Placeholder 1"/>
+          <p:cNvSpPr>
+            <a:spLocks noGrp="1" noRot="1" noChangeAspect="1"/>
+          </p:cNvSpPr>
+          <p:nvPr>
+            <p:ph type="sldImg"/>
+          </p:nvPr>
+        </p:nvSpPr>
+        <p:spPr/>
+      </p:sp>
+      <p:sp>
+        <p:nvSpPr>
+          <p:cNvPr id="3" name="Notes Placeholder 2"/>
+          <p:cNvSpPr>
+            <a:spLocks noGrp="1"/>
+          </p:cNvSpPr>
+          <p:nvPr>
+            <p:ph type="body" idx="1"/>
+          </p:nvPr>
+        </p:nvSpPr>
+        <p:spPr/>
+        <p:txBody>
+          <a:bodyPr/>
+          <a:lstStyle/>
+          <a:p>
+            <a:r>
+              <a:rPr lang="en-US" dirty="0"/>
+              <a:t>These are the references and picture credits used to prepare this lesson.</a:t>
+            </a:r>
+            <a:endParaRPr lang="en-US" dirty="0"/>
+          </a:p>
+        </p:txBody>
+      </p:sp>
+      <p:sp>
+        <p:nvSpPr>
+          <p:cNvPr id="4" name="Slide Number Placeholder 3"/>
+          <p:cNvSpPr>
+            <a:spLocks noGrp="1"/>
+          </p:cNvSpPr>
+          <p:nvPr>
+            <p:ph type="sldNum" sz="quarter" idx="10"/>
+          </p:nvPr>
+        </p:nvSpPr>
+        <p:spPr/>
+        <p:txBody>
+          <a:bodyPr/>
+          <a:lstStyle/>
+          <a:p>
+            <a:fld id="{F7021451-1387-4CA6-816F-3879F97B5CBC}" type="slidenum">
+              <a:rPr lang="en-US"/>
+              <a:t>51</a:t>
             </a:fld>
             <a:endParaRPr lang="en-US"/>
           </a:p>
@@ -4863,7 +4952,7 @@
           <a:p>
             <a:r>
               <a:rPr lang="en-US" dirty="0"/>
-              <a:t>Listen carefully to this situation from real life. In the Garoua market, Rahila sees maize from Pitoa, fish from the Lagdo lake, beef from the Adamawa and firewood from the bush. Her mother says, "All these come from nature." Think about it, because I am going to ask you some questions.</a:t>
+              <a:t>Listen carefully to this situation from real life. In the Garoua market, Rahila sees maize from Pitoa, fish from the Lagdo lake, beef from the Adamawa and firewood from the bush. Her mother says: "All these come from nature." Rahila asks: "What do we call the work of taking things from nature?" Think about it, because I am going to ask you some questions.</a:t>
             </a:r>
             <a:endParaRPr lang="en-US" dirty="0"/>
           </a:p>
@@ -6546,7 +6635,7 @@
                 <a:ea typeface="Times New Roman" pitchFamily="34" charset="-122"/>
                 <a:cs typeface="Times New Roman" pitchFamily="34" charset="-120"/>
               </a:rPr>
-              <a:t>Rahila wants to know how these products are grouped.</a:t>
+              <a:t>Rahila does not know the name of the sector that takes products from nature.</a:t>
             </a:r>
             <a:endParaRPr lang="en-US" sz="4000" dirty="0"/>
           </a:p>
@@ -6765,7 +6854,7 @@
                 <a:ea typeface="Times New Roman" pitchFamily="34" charset="-122"/>
                 <a:cs typeface="Times New Roman" pitchFamily="34" charset="-120"/>
               </a:rPr>
-              <a:t>Where does each product come from?</a:t>
+              <a:t>Where does the fish come from?</a:t>
             </a:r>
             <a:endParaRPr lang="en-US" sz="4000" dirty="0"/>
           </a:p>
@@ -6984,7 +7073,7 @@
                 <a:ea typeface="Times New Roman" pitchFamily="34" charset="-122"/>
                 <a:cs typeface="Times New Roman" pitchFamily="34" charset="-120"/>
               </a:rPr>
-              <a:t>Maize from Pitoa, fish from Lagdo, beef from Adamawa, wood from the bush.</a:t>
+              <a:t>From the Lagdo lake.</a:t>
             </a:r>
             <a:endParaRPr lang="en-US" sz="4000" dirty="0"/>
           </a:p>
@@ -7203,7 +7292,7 @@
                 <a:ea typeface="Times New Roman" pitchFamily="34" charset="-122"/>
                 <a:cs typeface="Times New Roman" pitchFamily="34" charset="-120"/>
               </a:rPr>
-              <a:t>What do they have in common?</a:t>
+              <a:t>Where does the beef come from?</a:t>
             </a:r>
             <a:endParaRPr lang="en-US" sz="4000" dirty="0"/>
           </a:p>
@@ -7422,7 +7511,7 @@
                 <a:ea typeface="Times New Roman" pitchFamily="34" charset="-122"/>
                 <a:cs typeface="Times New Roman" pitchFamily="34" charset="-120"/>
               </a:rPr>
-              <a:t>They are all taken from nature.</a:t>
+              <a:t>From the Adamawa.</a:t>
             </a:r>
             <a:endParaRPr lang="en-US" sz="4000" dirty="0"/>
           </a:p>
@@ -7972,7 +8061,7 @@
                 <a:ea typeface="Calibri" pitchFamily="34" charset="-122"/>
                 <a:cs typeface="Calibri" pitchFamily="34" charset="-120"/>
               </a:rPr>
-              <a:t>1. AGRICULTURE</a:t>
+              <a:t>DEFINITION</a:t>
             </a:r>
             <a:endParaRPr lang="en-US" sz="1400" dirty="0"/>
           </a:p>
@@ -8074,7 +8163,7 @@
                 <a:ea typeface="Times New Roman" pitchFamily="34" charset="-122"/>
                 <a:cs typeface="Times New Roman" pitchFamily="34" charset="-120"/>
               </a:rPr>
-              <a:t>A farmer holds a cob of maize.</a:t>
+              <a:t>A maize farmer.</a:t>
             </a:r>
             <a:endParaRPr lang="en-US" sz="1800" dirty="0"/>
           </a:p>
@@ -8186,7 +8275,7 @@
                 <a:ea typeface="Calibri" pitchFamily="34" charset="-122"/>
                 <a:cs typeface="Calibri" pitchFamily="34" charset="-120"/>
               </a:rPr>
-              <a:t>1. AGRICULTURE</a:t>
+              <a:t>DEFINITION</a:t>
             </a:r>
             <a:endParaRPr lang="en-US" sz="1400" dirty="0"/>
           </a:p>
@@ -9000,7 +9089,7 @@
                 <a:ea typeface="Calibri" pitchFamily="34" charset="-122"/>
                 <a:cs typeface="Calibri" pitchFamily="34" charset="-120"/>
               </a:rPr>
-              <a:t>1. AGRICULTURE</a:t>
+              <a:t>DEFINITION</a:t>
             </a:r>
             <a:endParaRPr lang="en-US" sz="1400" dirty="0"/>
           </a:p>
@@ -9219,7 +9308,7 @@
                 <a:ea typeface="Calibri" pitchFamily="34" charset="-122"/>
                 <a:cs typeface="Calibri" pitchFamily="34" charset="-120"/>
               </a:rPr>
-              <a:t>1. LIVESTOCK REARING</a:t>
+              <a:t>EXAMPLES</a:t>
             </a:r>
             <a:endParaRPr lang="en-US" sz="1400" dirty="0"/>
           </a:p>
@@ -9433,7 +9522,7 @@
                 <a:ea typeface="Calibri" pitchFamily="34" charset="-122"/>
                 <a:cs typeface="Calibri" pitchFamily="34" charset="-120"/>
               </a:rPr>
-              <a:t>1. LIVESTOCK REARING</a:t>
+              <a:t>EXAMPLES</a:t>
             </a:r>
             <a:endParaRPr lang="en-US" sz="1400" dirty="0"/>
           </a:p>
@@ -9540,7 +9629,7 @@
                 <a:ea typeface="Times New Roman" pitchFamily="34" charset="-122"/>
                 <a:cs typeface="Times New Roman" pitchFamily="34" charset="-120"/>
               </a:rPr>
-              <a:t>Where do most cattle of Cameroon come from?</a:t>
+              <a:t>Which region of Cameroon rears many cattle?</a:t>
             </a:r>
             <a:endParaRPr lang="en-US" sz="4000" dirty="0"/>
           </a:p>
@@ -9652,7 +9741,7 @@
                 <a:ea typeface="Calibri" pitchFamily="34" charset="-122"/>
                 <a:cs typeface="Calibri" pitchFamily="34" charset="-120"/>
               </a:rPr>
-              <a:t>1. LIVESTOCK REARING</a:t>
+              <a:t>EXAMPLES</a:t>
             </a:r>
             <a:endParaRPr lang="en-US" sz="1400" dirty="0"/>
           </a:p>
@@ -9759,7 +9848,7 @@
                 <a:ea typeface="Times New Roman" pitchFamily="34" charset="-122"/>
                 <a:cs typeface="Times New Roman" pitchFamily="34" charset="-120"/>
               </a:rPr>
-              <a:t>From the North and the Adamawa plateau.</a:t>
+              <a:t>The Adamawa (also the North).</a:t>
             </a:r>
             <a:endParaRPr lang="en-US" sz="4000" dirty="0"/>
           </a:p>
@@ -9871,7 +9960,7 @@
                 <a:ea typeface="Calibri" pitchFamily="34" charset="-122"/>
                 <a:cs typeface="Calibri" pitchFamily="34" charset="-120"/>
               </a:rPr>
-              <a:t>1. FISHING</a:t>
+              <a:t>EXAMPLES</a:t>
             </a:r>
             <a:endParaRPr lang="en-US" sz="1400" dirty="0"/>
           </a:p>
@@ -9973,7 +10062,7 @@
                 <a:ea typeface="Times New Roman" pitchFamily="34" charset="-122"/>
                 <a:cs typeface="Times New Roman" pitchFamily="34" charset="-120"/>
               </a:rPr>
-              <a:t>Fresh fish for sale.</a:t>
+              <a:t>A fish market.</a:t>
             </a:r>
             <a:endParaRPr lang="en-US" sz="1800" dirty="0"/>
           </a:p>
@@ -10085,7 +10174,7 @@
                 <a:ea typeface="Calibri" pitchFamily="34" charset="-122"/>
                 <a:cs typeface="Calibri" pitchFamily="34" charset="-120"/>
               </a:rPr>
-              <a:t>1. FISHING</a:t>
+              <a:t>EXAMPLES</a:t>
             </a:r>
             <a:endParaRPr lang="en-US" sz="1400" dirty="0"/>
           </a:p>
@@ -10192,7 +10281,7 @@
                 <a:ea typeface="Times New Roman" pitchFamily="34" charset="-122"/>
                 <a:cs typeface="Times New Roman" pitchFamily="34" charset="-120"/>
               </a:rPr>
-              <a:t>Name two places where people fish in Cameroon.</a:t>
+              <a:t>Name one place where people fish in Cameroon.</a:t>
             </a:r>
             <a:endParaRPr lang="en-US" sz="4000" dirty="0"/>
           </a:p>
@@ -10304,7 +10393,7 @@
                 <a:ea typeface="Calibri" pitchFamily="34" charset="-122"/>
                 <a:cs typeface="Calibri" pitchFamily="34" charset="-120"/>
               </a:rPr>
-              <a:t>1. FISHING</a:t>
+              <a:t>EXAMPLES</a:t>
             </a:r>
             <a:endParaRPr lang="en-US" sz="1400" dirty="0"/>
           </a:p>
@@ -10411,7 +10500,7 @@
                 <a:ea typeface="Times New Roman" pitchFamily="34" charset="-122"/>
                 <a:cs typeface="Times New Roman" pitchFamily="34" charset="-120"/>
               </a:rPr>
-              <a:t>The Lagdo lake and the sea at Kribi (also Limbe, Douala).</a:t>
+              <a:t>The Lagdo lake (also the sea at Kribi).</a:t>
             </a:r>
             <a:endParaRPr lang="en-US" sz="4000" dirty="0"/>
           </a:p>
@@ -10523,7 +10612,7 @@
                 <a:ea typeface="Calibri" pitchFamily="34" charset="-122"/>
                 <a:cs typeface="Calibri" pitchFamily="34" charset="-120"/>
               </a:rPr>
-              <a:t>1. FORESTRY</a:t>
+              <a:t>EXAMPLES</a:t>
             </a:r>
             <a:endParaRPr lang="en-US" sz="1400" dirty="0"/>
           </a:p>
@@ -10625,7 +10714,7 @@
                 <a:ea typeface="Times New Roman" pitchFamily="34" charset="-122"/>
                 <a:cs typeface="Times New Roman" pitchFamily="34" charset="-120"/>
               </a:rPr>
-              <a:t>Logs from the forest of East Cameroon.</a:t>
+              <a:t>Logs.</a:t>
             </a:r>
             <a:endParaRPr lang="en-US" sz="1800" dirty="0"/>
           </a:p>
@@ -10737,7 +10826,7 @@
                 <a:ea typeface="Calibri" pitchFamily="34" charset="-122"/>
                 <a:cs typeface="Calibri" pitchFamily="34" charset="-120"/>
               </a:rPr>
-              <a:t>1. FORESTRY</a:t>
+              <a:t>EXAMPLES</a:t>
             </a:r>
             <a:endParaRPr lang="en-US" sz="1400" dirty="0"/>
           </a:p>
@@ -10956,7 +11045,7 @@
                 <a:ea typeface="Calibri" pitchFamily="34" charset="-122"/>
                 <a:cs typeface="Calibri" pitchFamily="34" charset="-120"/>
               </a:rPr>
-              <a:t>1. FORESTRY</a:t>
+              <a:t>EXAMPLES</a:t>
             </a:r>
             <a:endParaRPr lang="en-US" sz="1400" dirty="0"/>
           </a:p>
@@ -12184,7 +12273,7 @@
                 <a:ea typeface="Calibri" pitchFamily="34" charset="-122"/>
                 <a:cs typeface="Calibri" pitchFamily="34" charset="-120"/>
               </a:rPr>
-              <a:t>1. MINING</a:t>
+              <a:t>EXAMPLES</a:t>
             </a:r>
             <a:endParaRPr lang="en-US" sz="1400" dirty="0"/>
           </a:p>
@@ -12286,7 +12375,7 @@
                 <a:ea typeface="Times New Roman" pitchFamily="34" charset="-122"/>
                 <a:cs typeface="Times New Roman" pitchFamily="34" charset="-120"/>
               </a:rPr>
-              <a:t>People dig for gold by hand.</a:t>
+              <a:t>People digging.</a:t>
             </a:r>
             <a:endParaRPr lang="en-US" sz="1800" dirty="0"/>
           </a:p>
@@ -12398,7 +12487,7 @@
                 <a:ea typeface="Calibri" pitchFamily="34" charset="-122"/>
                 <a:cs typeface="Calibri" pitchFamily="34" charset="-120"/>
               </a:rPr>
-              <a:t>1. MINING</a:t>
+              <a:t>EXAMPLES</a:t>
             </a:r>
             <a:endParaRPr lang="en-US" sz="1400" dirty="0"/>
           </a:p>
@@ -12505,7 +12594,7 @@
                 <a:ea typeface="Times New Roman" pitchFamily="34" charset="-122"/>
                 <a:cs typeface="Times New Roman" pitchFamily="34" charset="-120"/>
               </a:rPr>
-              <a:t>What are these people taking from the ground?</a:t>
+              <a:t>What do we call taking minerals from the ground?</a:t>
             </a:r>
             <a:endParaRPr lang="en-US" sz="4000" dirty="0"/>
           </a:p>
@@ -12617,7 +12706,7 @@
                 <a:ea typeface="Calibri" pitchFamily="34" charset="-122"/>
                 <a:cs typeface="Calibri" pitchFamily="34" charset="-120"/>
               </a:rPr>
-              <a:t>1. MINING</a:t>
+              <a:t>EXAMPLES</a:t>
             </a:r>
             <a:endParaRPr lang="en-US" sz="1400" dirty="0"/>
           </a:p>
@@ -12724,7 +12813,7 @@
                 <a:ea typeface="Times New Roman" pitchFamily="34" charset="-122"/>
                 <a:cs typeface="Times New Roman" pitchFamily="34" charset="-120"/>
               </a:rPr>
-              <a:t>Gold. Taking minerals from the ground is mining.</a:t>
+              <a:t>Mining.</a:t>
             </a:r>
             <a:endParaRPr lang="en-US" sz="4000" dirty="0"/>
           </a:p>
@@ -12935,7 +13024,7 @@
               <a:buNone/>
             </a:pPr>
             <a:r>
-              <a:rPr lang="en-US" sz="4000" b="1" dirty="0">
+              <a:rPr lang="en-US" sz="3200" b="1" dirty="0">
                 <a:solidFill>
                   <a:srgbClr val="111111"/>
                 </a:solidFill>
@@ -12945,7 +13034,7 @@
               </a:rPr>
               <a:t>Topic: Economic Activities</a:t>
             </a:r>
-            <a:endParaRPr lang="en-US" sz="4000" dirty="0"/>
+            <a:endParaRPr lang="en-US" sz="3200" dirty="0"/>
           </a:p>
           <a:p>
             <a:pPr algn="l" indent="0" marL="0">
@@ -12955,7 +13044,7 @@
               <a:buNone/>
             </a:pPr>
             <a:r>
-              <a:rPr lang="en-US" sz="4000" b="1" dirty="0">
+              <a:rPr lang="en-US" sz="3200" b="1" dirty="0">
                 <a:solidFill>
                   <a:srgbClr val="111111"/>
                 </a:solidFill>
@@ -12965,7 +13054,7 @@
               </a:rPr>
               <a:t>Sub-topic: Sectors of the Economy</a:t>
             </a:r>
-            <a:endParaRPr lang="en-US" sz="4000" dirty="0"/>
+            <a:endParaRPr lang="en-US" sz="3200" dirty="0"/>
           </a:p>
           <a:p>
             <a:pPr algn="l" indent="0" marL="0">
@@ -12975,7 +13064,7 @@
               <a:buNone/>
             </a:pPr>
             <a:r>
-              <a:rPr lang="en-US" sz="4000" b="1" dirty="0">
+              <a:rPr lang="en-US" sz="3200" b="1" dirty="0">
                 <a:solidFill>
                   <a:srgbClr val="990011"/>
                 </a:solidFill>
@@ -12985,7 +13074,7 @@
               </a:rPr>
               <a:t>Lesson 5 (Part 3): The Sectors of the Economy: The Primary Sector (Definition and Examples)</a:t>
             </a:r>
-            <a:endParaRPr lang="en-US" sz="4000" dirty="0"/>
+            <a:endParaRPr lang="en-US" sz="3200" dirty="0"/>
           </a:p>
         </p:txBody>
       </p:sp>
@@ -13207,11 +13296,12 @@
             <a:endParaRPr lang="en-US" sz="4000" dirty="0"/>
           </a:p>
           <a:p>
-            <a:pPr algn="l" indent="0" marL="0">
+            <a:pPr algn="l" marL="342900" indent="-342900">
               <a:spcAft>
                 <a:spcPts val="800"/>
               </a:spcAft>
-              <a:buNone/>
+              <a:buSzPct val="100000"/>
+              <a:buChar char="•"/>
             </a:pPr>
             <a:r>
               <a:rPr lang="en-US" sz="4000" b="1" dirty="0">
@@ -13224,11 +13314,12 @@
               </a:rPr>
               <a:t>Primary sector: </a:t>
             </a:r>
-            <a:pPr algn="l" indent="0" marL="0">
+            <a:pPr algn="l" marL="342900" indent="-342900">
               <a:spcAft>
                 <a:spcPts val="800"/>
               </a:spcAft>
-              <a:buNone/>
+              <a:buSzPct val="100000"/>
+              <a:buChar char="•"/>
             </a:pPr>
             <a:r>
               <a:rPr lang="en-US" sz="4000" dirty="0">
@@ -13239,7 +13330,7 @@
                 <a:ea typeface="Times New Roman" pitchFamily="34" charset="-122"/>
                 <a:cs typeface="Times New Roman" pitchFamily="34" charset="-120"/>
               </a:rPr>
-              <a:t>It is the sector that takes products directly from nature.</a:t>
+              <a:t>It is made of activities that take resources directly from nature.</a:t>
             </a:r>
             <a:endParaRPr lang="en-US" sz="4000" dirty="0"/>
           </a:p>
@@ -13357,9 +13448,131 @@
           </a:p>
         </p:txBody>
       </p:sp>
+      <p:sp>
+        <p:nvSpPr>
+          <p:cNvPr id="3" name="Text 1"/>
+          <p:cNvSpPr/>
+          <p:nvPr/>
+        </p:nvSpPr>
+        <p:spPr>
+          <a:xfrm>
+            <a:off x="365760" y="1005840"/>
+            <a:ext cx="11460175" cy="731520"/>
+          </a:xfrm>
+          <a:prstGeom prst="rect">
+            <a:avLst/>
+          </a:prstGeom>
+          <a:noFill/>
+          <a:ln/>
+        </p:spPr>
+        <p:txBody>
+          <a:bodyPr wrap="square" lIns="0" tIns="0" rIns="0" bIns="0" rtlCol="0" anchor="ctr">
+            <a:normAutofit/>
+          </a:bodyPr>
+          <a:lstStyle/>
+          <a:p>
+            <a:pPr algn="ctr" indent="0" marL="0">
+              <a:buNone/>
+            </a:pPr>
+            <a:r>
+              <a:rPr lang="en-US" sz="3600" b="1" dirty="0">
+                <a:solidFill>
+                  <a:srgbClr val="990011"/>
+                </a:solidFill>
+                <a:latin typeface="Times New Roman" pitchFamily="34" charset="0"/>
+                <a:ea typeface="Times New Roman" pitchFamily="34" charset="-122"/>
+                <a:cs typeface="Times New Roman" pitchFamily="34" charset="-120"/>
+              </a:rPr>
+              <a:t>Examples of Primary Activities</a:t>
+            </a:r>
+            <a:endParaRPr lang="en-US" sz="3600" dirty="0"/>
+          </a:p>
+        </p:txBody>
+      </p:sp>
+      <p:sp>
+        <p:nvSpPr>
+          <p:cNvPr id="4" name="Text 2"/>
+          <p:cNvSpPr/>
+          <p:nvPr/>
+        </p:nvSpPr>
+        <p:spPr>
+          <a:xfrm>
+            <a:off x="365760" y="1783080"/>
+            <a:ext cx="4846320" cy="4617720"/>
+          </a:xfrm>
+          <a:prstGeom prst="rect">
+            <a:avLst/>
+          </a:prstGeom>
+          <a:noFill/>
+          <a:ln/>
+        </p:spPr>
+        <p:txBody>
+          <a:bodyPr wrap="square" lIns="0" tIns="0" rIns="0" bIns="0" rtlCol="0" anchor="t"/>
+          <a:lstStyle/>
+          <a:p>
+            <a:pPr algn="l" indent="0" marL="0">
+              <a:spcAft>
+                <a:spcPts val="800"/>
+              </a:spcAft>
+              <a:buNone/>
+            </a:pPr>
+            <a:r>
+              <a:rPr lang="en-US" sz="3600" i="1" dirty="0">
+                <a:solidFill>
+                  <a:srgbClr val="111111"/>
+                </a:solidFill>
+                <a:latin typeface="Times New Roman" pitchFamily="34" charset="0"/>
+                <a:ea typeface="Times New Roman" pitchFamily="34" charset="-122"/>
+                <a:cs typeface="Times New Roman" pitchFamily="34" charset="-120"/>
+              </a:rPr>
+              <a:t>The primary sector includes the following activities:</a:t>
+            </a:r>
+            <a:endParaRPr lang="en-US" sz="3600" dirty="0"/>
+          </a:p>
+          <a:p>
+            <a:pPr algn="l" marL="342900" indent="-342900">
+              <a:spcAft>
+                <a:spcPts val="800"/>
+              </a:spcAft>
+              <a:buSzPct val="100000"/>
+              <a:buChar char="•"/>
+            </a:pPr>
+            <a:r>
+              <a:rPr lang="en-US" sz="3600" b="1" dirty="0">
+                <a:solidFill>
+                  <a:srgbClr val="111111"/>
+                </a:solidFill>
+                <a:latin typeface="Times New Roman" pitchFamily="34" charset="0"/>
+                <a:ea typeface="Times New Roman" pitchFamily="34" charset="-122"/>
+                <a:cs typeface="Times New Roman" pitchFamily="34" charset="-120"/>
+              </a:rPr>
+              <a:t>Farming: </a:t>
+            </a:r>
+            <a:pPr algn="l" marL="342900" indent="-342900">
+              <a:spcAft>
+                <a:spcPts val="800"/>
+              </a:spcAft>
+              <a:buSzPct val="100000"/>
+              <a:buChar char="•"/>
+            </a:pPr>
+            <a:r>
+              <a:rPr lang="en-US" sz="3600" dirty="0">
+                <a:solidFill>
+                  <a:srgbClr val="111111"/>
+                </a:solidFill>
+                <a:latin typeface="Times New Roman" pitchFamily="34" charset="0"/>
+                <a:ea typeface="Times New Roman" pitchFamily="34" charset="-122"/>
+                <a:cs typeface="Times New Roman" pitchFamily="34" charset="-120"/>
+              </a:rPr>
+              <a:t>Maize, cotton and onions in the North.</a:t>
+            </a:r>
+            <a:endParaRPr lang="en-US" sz="3600" dirty="0"/>
+          </a:p>
+        </p:txBody>
+      </p:sp>
       <p:pic>
         <p:nvPicPr>
-          <p:cNvPr id="3" name="Image 0" descr="/home/claude/f4/img/minesec_sheet.png">    </p:cNvPr>
+          <p:cNvPr id="5" name="Image 0" descr="/home/claude/f4/img/v2/f2t_maize.jpg">    </p:cNvPr>
           <p:cNvPicPr>
             <a:picLocks noChangeAspect="1"/>
           </p:cNvPicPr>
@@ -13373,8 +13586,8 @@
         </p:blipFill>
         <p:spPr>
           <a:xfrm>
-            <a:off x="0" y="658368"/>
-            <a:ext cx="3840480" cy="5833872"/>
+            <a:off x="5349240" y="2069407"/>
+            <a:ext cx="6659575" cy="3697594"/>
           </a:xfrm>
           <a:prstGeom prst="rect">
             <a:avLst/>
@@ -13383,14 +13596,14 @@
       </p:pic>
       <p:sp>
         <p:nvSpPr>
-          <p:cNvPr id="4" name="Text 1"/>
+          <p:cNvPr id="6" name="Text 3"/>
           <p:cNvSpPr/>
           <p:nvPr/>
         </p:nvSpPr>
         <p:spPr>
           <a:xfrm>
-            <a:off x="4069080" y="1005840"/>
-            <a:ext cx="7802575" cy="731520"/>
+            <a:off x="5349240" y="6089904"/>
+            <a:ext cx="6659575" cy="347472"/>
           </a:xfrm>
           <a:prstGeom prst="rect">
             <a:avLst/>
@@ -13399,142 +13612,24 @@
           <a:ln/>
         </p:spPr>
         <p:txBody>
-          <a:bodyPr wrap="square" lIns="0" tIns="0" rIns="0" bIns="0" rtlCol="0" anchor="ctr">
-            <a:normAutofit/>
-          </a:bodyPr>
+          <a:bodyPr wrap="square" lIns="0" tIns="0" rIns="0" bIns="0" rtlCol="0" anchor="ctr"/>
           <a:lstStyle/>
           <a:p>
             <a:pPr algn="ctr" indent="0" marL="0">
               <a:buNone/>
             </a:pPr>
             <a:r>
-              <a:rPr lang="en-US" sz="3600" b="1" dirty="0">
-                <a:solidFill>
-                  <a:srgbClr val="990011"/>
+              <a:rPr lang="en-US" sz="1600" i="1" dirty="0">
+                <a:solidFill>
+                  <a:srgbClr val="555555"/>
                 </a:solidFill>
                 <a:latin typeface="Times New Roman" pitchFamily="34" charset="0"/>
                 <a:ea typeface="Times New Roman" pitchFamily="34" charset="-122"/>
                 <a:cs typeface="Times New Roman" pitchFamily="34" charset="-120"/>
               </a:rPr>
-              <a:t>1. Examples of the Primary Sector</a:t>
-            </a:r>
-            <a:endParaRPr lang="en-US" sz="3600" dirty="0"/>
-          </a:p>
-        </p:txBody>
-      </p:sp>
-      <p:sp>
-        <p:nvSpPr>
-          <p:cNvPr id="5" name="Text 2"/>
-          <p:cNvSpPr/>
-          <p:nvPr/>
-        </p:nvSpPr>
-        <p:spPr>
-          <a:xfrm>
-            <a:off x="4069080" y="1783080"/>
-            <a:ext cx="7802575" cy="4663440"/>
-          </a:xfrm>
-          <a:prstGeom prst="rect">
-            <a:avLst/>
-          </a:prstGeom>
-          <a:noFill/>
-          <a:ln/>
-        </p:spPr>
-        <p:txBody>
-          <a:bodyPr wrap="square" lIns="0" tIns="0" rIns="0" bIns="0" rtlCol="0" anchor="t"/>
-          <a:lstStyle/>
-          <a:p>
-            <a:pPr algn="l" indent="0" marL="0">
-              <a:spcAft>
-                <a:spcPts val="800"/>
-              </a:spcAft>
-              <a:buNone/>
-            </a:pPr>
-            <a:r>
-              <a:rPr lang="en-US" sz="4000" i="1" dirty="0">
-                <a:solidFill>
-                  <a:srgbClr val="111111"/>
-                </a:solidFill>
-                <a:latin typeface="Times New Roman" pitchFamily="34" charset="0"/>
-                <a:ea typeface="Times New Roman" pitchFamily="34" charset="-122"/>
-                <a:cs typeface="Times New Roman" pitchFamily="34" charset="-120"/>
-              </a:rPr>
-              <a:t>The primary sector in Cameroon includes the following activities:</a:t>
-            </a:r>
-            <a:endParaRPr lang="en-US" sz="4000" dirty="0"/>
-          </a:p>
-          <a:p>
-            <a:pPr algn="l" indent="0" marL="0">
-              <a:spcAft>
-                <a:spcPts val="800"/>
-              </a:spcAft>
-              <a:buNone/>
-            </a:pPr>
-            <a:r>
-              <a:rPr lang="en-US" sz="4000" b="1" dirty="0">
-                <a:solidFill>
-                  <a:srgbClr val="111111"/>
-                </a:solidFill>
-                <a:latin typeface="Times New Roman" pitchFamily="34" charset="0"/>
-                <a:ea typeface="Times New Roman" pitchFamily="34" charset="-122"/>
-                <a:cs typeface="Times New Roman" pitchFamily="34" charset="-120"/>
-              </a:rPr>
-              <a:t>Agriculture: </a:t>
-            </a:r>
-            <a:pPr algn="l" indent="0" marL="0">
-              <a:spcAft>
-                <a:spcPts val="800"/>
-              </a:spcAft>
-              <a:buNone/>
-            </a:pPr>
-            <a:r>
-              <a:rPr lang="en-US" sz="4000" dirty="0">
-                <a:solidFill>
-                  <a:srgbClr val="111111"/>
-                </a:solidFill>
-                <a:latin typeface="Times New Roman" pitchFamily="34" charset="0"/>
-                <a:ea typeface="Times New Roman" pitchFamily="34" charset="-122"/>
-                <a:cs typeface="Times New Roman" pitchFamily="34" charset="-120"/>
-              </a:rPr>
-              <a:t>Farmers grow maize, cassava, cotton and cocoa.</a:t>
-            </a:r>
-            <a:endParaRPr lang="en-US" sz="4000" dirty="0"/>
-          </a:p>
-          <a:p>
-            <a:pPr algn="l" indent="0" marL="0">
-              <a:spcAft>
-                <a:spcPts val="800"/>
-              </a:spcAft>
-              <a:buNone/>
-            </a:pPr>
-            <a:r>
-              <a:rPr lang="en-US" sz="4000" b="1" dirty="0">
-                <a:solidFill>
-                  <a:srgbClr val="111111"/>
-                </a:solidFill>
-                <a:latin typeface="Times New Roman" pitchFamily="34" charset="0"/>
-                <a:ea typeface="Times New Roman" pitchFamily="34" charset="-122"/>
-                <a:cs typeface="Times New Roman" pitchFamily="34" charset="-120"/>
-              </a:rPr>
-              <a:t>Livestock rearing: </a:t>
-            </a:r>
-            <a:pPr algn="l" indent="0" marL="0">
-              <a:spcAft>
-                <a:spcPts val="800"/>
-              </a:spcAft>
-              <a:buNone/>
-            </a:pPr>
-            <a:r>
-              <a:rPr lang="en-US" sz="4000" dirty="0">
-                <a:solidFill>
-                  <a:srgbClr val="111111"/>
-                </a:solidFill>
-                <a:latin typeface="Times New Roman" pitchFamily="34" charset="0"/>
-                <a:ea typeface="Times New Roman" pitchFamily="34" charset="-122"/>
-                <a:cs typeface="Times New Roman" pitchFamily="34" charset="-120"/>
-              </a:rPr>
-              <a:t>Herders rear cattle in the North and on the Adamawa plateau.</a:t>
-            </a:r>
-            <a:endParaRPr lang="en-US" sz="4000" dirty="0"/>
+              <a:t>Illustration: a maize farmer</a:t>
+            </a:r>
+            <a:endParaRPr lang="en-US" sz="1600" dirty="0"/>
           </a:p>
         </p:txBody>
       </p:sp>
@@ -13650,9 +13745,111 @@
           </a:p>
         </p:txBody>
       </p:sp>
+      <p:sp>
+        <p:nvSpPr>
+          <p:cNvPr id="3" name="Text 1"/>
+          <p:cNvSpPr/>
+          <p:nvPr/>
+        </p:nvSpPr>
+        <p:spPr>
+          <a:xfrm>
+            <a:off x="365760" y="1005840"/>
+            <a:ext cx="11460175" cy="731520"/>
+          </a:xfrm>
+          <a:prstGeom prst="rect">
+            <a:avLst/>
+          </a:prstGeom>
+          <a:noFill/>
+          <a:ln/>
+        </p:spPr>
+        <p:txBody>
+          <a:bodyPr wrap="square" lIns="0" tIns="0" rIns="0" bIns="0" rtlCol="0" anchor="ctr">
+            <a:normAutofit/>
+          </a:bodyPr>
+          <a:lstStyle/>
+          <a:p>
+            <a:pPr algn="ctr" indent="0" marL="0">
+              <a:buNone/>
+            </a:pPr>
+            <a:r>
+              <a:rPr lang="en-US" sz="3600" b="1" dirty="0">
+                <a:solidFill>
+                  <a:srgbClr val="990011"/>
+                </a:solidFill>
+                <a:latin typeface="Times New Roman" pitchFamily="34" charset="0"/>
+                <a:ea typeface="Times New Roman" pitchFamily="34" charset="-122"/>
+                <a:cs typeface="Times New Roman" pitchFamily="34" charset="-120"/>
+              </a:rPr>
+              <a:t>Examples of Primary Activities</a:t>
+            </a:r>
+            <a:endParaRPr lang="en-US" sz="3600" dirty="0"/>
+          </a:p>
+        </p:txBody>
+      </p:sp>
+      <p:sp>
+        <p:nvSpPr>
+          <p:cNvPr id="4" name="Text 2"/>
+          <p:cNvSpPr/>
+          <p:nvPr/>
+        </p:nvSpPr>
+        <p:spPr>
+          <a:xfrm>
+            <a:off x="365760" y="1783080"/>
+            <a:ext cx="4846320" cy="4617720"/>
+          </a:xfrm>
+          <a:prstGeom prst="rect">
+            <a:avLst/>
+          </a:prstGeom>
+          <a:noFill/>
+          <a:ln/>
+        </p:spPr>
+        <p:txBody>
+          <a:bodyPr wrap="square" lIns="0" tIns="0" rIns="0" bIns="0" rtlCol="0" anchor="t"/>
+          <a:lstStyle/>
+          <a:p>
+            <a:pPr algn="l" marL="342900" indent="-342900">
+              <a:spcAft>
+                <a:spcPts val="800"/>
+              </a:spcAft>
+              <a:buSzPct val="100000"/>
+              <a:buChar char="•"/>
+            </a:pPr>
+            <a:r>
+              <a:rPr lang="en-US" sz="3600" b="1" dirty="0">
+                <a:solidFill>
+                  <a:srgbClr val="111111"/>
+                </a:solidFill>
+                <a:latin typeface="Times New Roman" pitchFamily="34" charset="0"/>
+                <a:ea typeface="Times New Roman" pitchFamily="34" charset="-122"/>
+                <a:cs typeface="Times New Roman" pitchFamily="34" charset="-120"/>
+              </a:rPr>
+              <a:t>Livestock rearing: </a:t>
+            </a:r>
+            <a:pPr algn="l" marL="342900" indent="-342900">
+              <a:spcAft>
+                <a:spcPts val="800"/>
+              </a:spcAft>
+              <a:buSzPct val="100000"/>
+              <a:buChar char="•"/>
+            </a:pPr>
+            <a:r>
+              <a:rPr lang="en-US" sz="3600" dirty="0">
+                <a:solidFill>
+                  <a:srgbClr val="111111"/>
+                </a:solidFill>
+                <a:latin typeface="Times New Roman" pitchFamily="34" charset="0"/>
+                <a:ea typeface="Times New Roman" pitchFamily="34" charset="-122"/>
+                <a:cs typeface="Times New Roman" pitchFamily="34" charset="-120"/>
+              </a:rPr>
+              <a:t>Cattle in the North and the Adamawa.</a:t>
+            </a:r>
+            <a:endParaRPr lang="en-US" sz="3600" dirty="0"/>
+          </a:p>
+        </p:txBody>
+      </p:sp>
       <p:pic>
         <p:nvPicPr>
-          <p:cNvPr id="3" name="Image 0" descr="/home/claude/f4/img/minesec_sheet.png">    </p:cNvPr>
+          <p:cNvPr id="5" name="Image 0" descr="/home/claude/f4/img/v2/f2t_cattle_market.jpg">    </p:cNvPr>
           <p:cNvPicPr>
             <a:picLocks noChangeAspect="1"/>
           </p:cNvPicPr>
@@ -13666,8 +13863,8 @@
         </p:blipFill>
         <p:spPr>
           <a:xfrm>
-            <a:off x="0" y="658368"/>
-            <a:ext cx="3840480" cy="5833872"/>
+            <a:off x="5349240" y="2071212"/>
+            <a:ext cx="6659575" cy="3693983"/>
           </a:xfrm>
           <a:prstGeom prst="rect">
             <a:avLst/>
@@ -13676,14 +13873,14 @@
       </p:pic>
       <p:sp>
         <p:nvSpPr>
-          <p:cNvPr id="4" name="Text 1"/>
+          <p:cNvPr id="6" name="Text 3"/>
           <p:cNvSpPr/>
           <p:nvPr/>
         </p:nvSpPr>
         <p:spPr>
           <a:xfrm>
-            <a:off x="4069080" y="1005840"/>
-            <a:ext cx="7802575" cy="731520"/>
+            <a:off x="5349240" y="6089904"/>
+            <a:ext cx="6659575" cy="347472"/>
           </a:xfrm>
           <a:prstGeom prst="rect">
             <a:avLst/>
@@ -13692,159 +13889,24 @@
           <a:ln/>
         </p:spPr>
         <p:txBody>
-          <a:bodyPr wrap="square" lIns="0" tIns="0" rIns="0" bIns="0" rtlCol="0" anchor="ctr">
-            <a:normAutofit/>
-          </a:bodyPr>
+          <a:bodyPr wrap="square" lIns="0" tIns="0" rIns="0" bIns="0" rtlCol="0" anchor="ctr"/>
           <a:lstStyle/>
           <a:p>
             <a:pPr algn="ctr" indent="0" marL="0">
               <a:buNone/>
             </a:pPr>
             <a:r>
-              <a:rPr lang="en-US" sz="3600" b="1" dirty="0">
-                <a:solidFill>
-                  <a:srgbClr val="990011"/>
+              <a:rPr lang="en-US" sz="1600" i="1" dirty="0">
+                <a:solidFill>
+                  <a:srgbClr val="555555"/>
                 </a:solidFill>
                 <a:latin typeface="Times New Roman" pitchFamily="34" charset="0"/>
                 <a:ea typeface="Times New Roman" pitchFamily="34" charset="-122"/>
                 <a:cs typeface="Times New Roman" pitchFamily="34" charset="-120"/>
               </a:rPr>
-              <a:t>1. Examples of the Primary Sector (continued)</a:t>
-            </a:r>
-            <a:endParaRPr lang="en-US" sz="3600" dirty="0"/>
-          </a:p>
-        </p:txBody>
-      </p:sp>
-      <p:sp>
-        <p:nvSpPr>
-          <p:cNvPr id="5" name="Text 2"/>
-          <p:cNvSpPr/>
-          <p:nvPr/>
-        </p:nvSpPr>
-        <p:spPr>
-          <a:xfrm>
-            <a:off x="4069080" y="1783080"/>
-            <a:ext cx="7802575" cy="4663440"/>
-          </a:xfrm>
-          <a:prstGeom prst="rect">
-            <a:avLst/>
-          </a:prstGeom>
-          <a:noFill/>
-          <a:ln/>
-        </p:spPr>
-        <p:txBody>
-          <a:bodyPr wrap="square" lIns="0" tIns="0" rIns="0" bIns="0" rtlCol="0" anchor="t"/>
-          <a:lstStyle/>
-          <a:p>
-            <a:pPr algn="l" indent="0" marL="0">
-              <a:spcAft>
-                <a:spcPts val="800"/>
-              </a:spcAft>
-              <a:buNone/>
-            </a:pPr>
-            <a:r>
-              <a:rPr lang="en-US" sz="4000" b="1" dirty="0">
-                <a:solidFill>
-                  <a:srgbClr val="111111"/>
-                </a:solidFill>
-                <a:latin typeface="Times New Roman" pitchFamily="34" charset="0"/>
-                <a:ea typeface="Times New Roman" pitchFamily="34" charset="-122"/>
-                <a:cs typeface="Times New Roman" pitchFamily="34" charset="-120"/>
-              </a:rPr>
-              <a:t>Fishing: </a:t>
-            </a:r>
-            <a:pPr algn="l" indent="0" marL="0">
-              <a:spcAft>
-                <a:spcPts val="800"/>
-              </a:spcAft>
-              <a:buNone/>
-            </a:pPr>
-            <a:r>
-              <a:rPr lang="en-US" sz="4000" dirty="0">
-                <a:solidFill>
-                  <a:srgbClr val="111111"/>
-                </a:solidFill>
-                <a:latin typeface="Times New Roman" pitchFamily="34" charset="0"/>
-                <a:ea typeface="Times New Roman" pitchFamily="34" charset="-122"/>
-                <a:cs typeface="Times New Roman" pitchFamily="34" charset="-120"/>
-              </a:rPr>
-              <a:t>People fish in the Lagdo lake and at sea near Kribi and Limbe.</a:t>
-            </a:r>
-            <a:endParaRPr lang="en-US" sz="4000" dirty="0"/>
-          </a:p>
-          <a:p>
-            <a:pPr algn="l" indent="0" marL="0">
-              <a:spcAft>
-                <a:spcPts val="800"/>
-              </a:spcAft>
-              <a:buNone/>
-            </a:pPr>
-            <a:r>
-              <a:rPr lang="en-US" sz="4000" b="1" dirty="0">
-                <a:solidFill>
-                  <a:srgbClr val="111111"/>
-                </a:solidFill>
-                <a:latin typeface="Times New Roman" pitchFamily="34" charset="0"/>
-                <a:ea typeface="Times New Roman" pitchFamily="34" charset="-122"/>
-                <a:cs typeface="Times New Roman" pitchFamily="34" charset="-120"/>
-              </a:rPr>
-              <a:t>Forestry: </a:t>
-            </a:r>
-            <a:pPr algn="l" indent="0" marL="0">
-              <a:spcAft>
-                <a:spcPts val="800"/>
-              </a:spcAft>
-              <a:buNone/>
-            </a:pPr>
-            <a:r>
-              <a:rPr lang="en-US" sz="4000" dirty="0">
-                <a:solidFill>
-                  <a:srgbClr val="111111"/>
-                </a:solidFill>
-                <a:latin typeface="Times New Roman" pitchFamily="34" charset="0"/>
-                <a:ea typeface="Times New Roman" pitchFamily="34" charset="-122"/>
-                <a:cs typeface="Times New Roman" pitchFamily="34" charset="-120"/>
-              </a:rPr>
-              <a:t>Timber is cut in the forests of the South and East.</a:t>
-            </a:r>
-            <a:endParaRPr lang="en-US" sz="4000" dirty="0"/>
-          </a:p>
-          <a:p>
-            <a:pPr algn="l" indent="0" marL="0">
-              <a:spcAft>
-                <a:spcPts val="800"/>
-              </a:spcAft>
-              <a:buNone/>
-            </a:pPr>
-            <a:r>
-              <a:rPr lang="en-US" sz="4000" b="1" dirty="0">
-                <a:solidFill>
-                  <a:srgbClr val="111111"/>
-                </a:solidFill>
-                <a:latin typeface="Times New Roman" pitchFamily="34" charset="0"/>
-                <a:ea typeface="Times New Roman" pitchFamily="34" charset="-122"/>
-                <a:cs typeface="Times New Roman" pitchFamily="34" charset="-120"/>
-              </a:rPr>
-              <a:t>Mining: </a:t>
-            </a:r>
-            <a:pPr algn="l" indent="0" marL="0">
-              <a:spcAft>
-                <a:spcPts val="800"/>
-              </a:spcAft>
-              <a:buNone/>
-            </a:pPr>
-            <a:r>
-              <a:rPr lang="en-US" sz="4000" dirty="0">
-                <a:solidFill>
-                  <a:srgbClr val="111111"/>
-                </a:solidFill>
-                <a:latin typeface="Times New Roman" pitchFamily="34" charset="0"/>
-                <a:ea typeface="Times New Roman" pitchFamily="34" charset="-122"/>
-                <a:cs typeface="Times New Roman" pitchFamily="34" charset="-120"/>
-              </a:rPr>
-              <a:t>Oil, gold and limestone are taken from the ground.</a:t>
-            </a:r>
-            <a:endParaRPr lang="en-US" sz="4000" dirty="0"/>
+              <a:t>Illustration: a cattle market</a:t>
+            </a:r>
+            <a:endParaRPr lang="en-US" sz="1600" dirty="0"/>
           </a:p>
         </p:txBody>
       </p:sp>
@@ -14019,7 +14081,7 @@
                 <a:ea typeface="Times New Roman" pitchFamily="34" charset="-122"/>
                 <a:cs typeface="Times New Roman" pitchFamily="34" charset="-120"/>
               </a:rPr>
-              <a:t>2. Importance of the Primary Sector</a:t>
+              <a:t>Examples of Primary Activities</a:t>
             </a:r>
             <a:endParaRPr lang="en-US" sz="3600" dirty="0"/>
           </a:p>
@@ -14046,14 +14108,15 @@
           <a:bodyPr wrap="square" lIns="0" tIns="0" rIns="0" bIns="0" rtlCol="0" anchor="t"/>
           <a:lstStyle/>
           <a:p>
-            <a:pPr algn="l" indent="0" marL="0">
+            <a:pPr algn="l" marL="342900" indent="-342900">
               <a:spcAft>
                 <a:spcPts val="800"/>
               </a:spcAft>
-              <a:buNone/>
+              <a:buSzPct val="100000"/>
+              <a:buChar char="•"/>
             </a:pPr>
             <a:r>
-              <a:rPr lang="en-US" sz="4000" i="1" dirty="0">
+              <a:rPr lang="en-US" sz="4000" b="1" dirty="0">
                 <a:solidFill>
                   <a:srgbClr val="111111"/>
                 </a:solidFill>
@@ -14061,19 +14124,17 @@
                 <a:ea typeface="Times New Roman" pitchFamily="34" charset="-122"/>
                 <a:cs typeface="Times New Roman" pitchFamily="34" charset="-120"/>
               </a:rPr>
-              <a:t>The primary sector is important for the following reasons:</a:t>
-            </a:r>
-            <a:endParaRPr lang="en-US" sz="4000" dirty="0"/>
-          </a:p>
-          <a:p>
-            <a:pPr algn="l" indent="0" marL="0">
+              <a:t>Fishing: </a:t>
+            </a:r>
+            <a:pPr algn="l" marL="342900" indent="-342900">
               <a:spcAft>
                 <a:spcPts val="800"/>
               </a:spcAft>
-              <a:buNone/>
+              <a:buSzPct val="100000"/>
+              <a:buChar char="•"/>
             </a:pPr>
             <a:r>
-              <a:rPr lang="en-US" sz="4000" b="1" dirty="0">
+              <a:rPr lang="en-US" sz="4000" dirty="0">
                 <a:solidFill>
                   <a:srgbClr val="111111"/>
                 </a:solidFill>
@@ -14081,16 +14142,20 @@
                 <a:ea typeface="Times New Roman" pitchFamily="34" charset="-122"/>
                 <a:cs typeface="Times New Roman" pitchFamily="34" charset="-120"/>
               </a:rPr>
-              <a:t>Food: </a:t>
-            </a:r>
-            <a:pPr algn="l" indent="0" marL="0">
+              <a:t>In the Lagdo lake and at sea.</a:t>
+            </a:r>
+            <a:endParaRPr lang="en-US" sz="4000" dirty="0"/>
+          </a:p>
+          <a:p>
+            <a:pPr algn="l" marL="342900" indent="-342900">
               <a:spcAft>
                 <a:spcPts val="800"/>
               </a:spcAft>
-              <a:buNone/>
+              <a:buSzPct val="100000"/>
+              <a:buChar char="•"/>
             </a:pPr>
             <a:r>
-              <a:rPr lang="en-US" sz="4000" dirty="0">
+              <a:rPr lang="en-US" sz="4000" b="1" dirty="0">
                 <a:solidFill>
                   <a:srgbClr val="111111"/>
                 </a:solidFill>
@@ -14098,19 +14163,17 @@
                 <a:ea typeface="Times New Roman" pitchFamily="34" charset="-122"/>
                 <a:cs typeface="Times New Roman" pitchFamily="34" charset="-120"/>
               </a:rPr>
-              <a:t>It feeds the population.</a:t>
-            </a:r>
-            <a:endParaRPr lang="en-US" sz="4000" dirty="0"/>
-          </a:p>
-          <a:p>
-            <a:pPr algn="l" indent="0" marL="0">
+              <a:t>Forestry: </a:t>
+            </a:r>
+            <a:pPr algn="l" marL="342900" indent="-342900">
               <a:spcAft>
                 <a:spcPts val="800"/>
               </a:spcAft>
-              <a:buNone/>
+              <a:buSzPct val="100000"/>
+              <a:buChar char="•"/>
             </a:pPr>
             <a:r>
-              <a:rPr lang="en-US" sz="4000" b="1" dirty="0">
+              <a:rPr lang="en-US" sz="4000" dirty="0">
                 <a:solidFill>
                   <a:srgbClr val="111111"/>
                 </a:solidFill>
@@ -14118,24 +14181,7 @@
                 <a:ea typeface="Times New Roman" pitchFamily="34" charset="-122"/>
                 <a:cs typeface="Times New Roman" pitchFamily="34" charset="-120"/>
               </a:rPr>
-              <a:t>Jobs: </a:t>
-            </a:r>
-            <a:pPr algn="l" indent="0" marL="0">
-              <a:spcAft>
-                <a:spcPts val="800"/>
-              </a:spcAft>
-              <a:buNone/>
-            </a:pPr>
-            <a:r>
-              <a:rPr lang="en-US" sz="4000" dirty="0">
-                <a:solidFill>
-                  <a:srgbClr val="111111"/>
-                </a:solidFill>
-                <a:latin typeface="Times New Roman" pitchFamily="34" charset="0"/>
-                <a:ea typeface="Times New Roman" pitchFamily="34" charset="-122"/>
-                <a:cs typeface="Times New Roman" pitchFamily="34" charset="-120"/>
-              </a:rPr>
-              <a:t>It employs most people in the villages.</a:t>
+              <a:t>Timber from the forests of the South and East.</a:t>
             </a:r>
             <a:endParaRPr lang="en-US" sz="4000" dirty="0"/>
           </a:p>
@@ -14253,9 +14299,111 @@
           </a:p>
         </p:txBody>
       </p:sp>
+      <p:sp>
+        <p:nvSpPr>
+          <p:cNvPr id="3" name="Text 1"/>
+          <p:cNvSpPr/>
+          <p:nvPr/>
+        </p:nvSpPr>
+        <p:spPr>
+          <a:xfrm>
+            <a:off x="365760" y="1005840"/>
+            <a:ext cx="11460175" cy="731520"/>
+          </a:xfrm>
+          <a:prstGeom prst="rect">
+            <a:avLst/>
+          </a:prstGeom>
+          <a:noFill/>
+          <a:ln/>
+        </p:spPr>
+        <p:txBody>
+          <a:bodyPr wrap="square" lIns="0" tIns="0" rIns="0" bIns="0" rtlCol="0" anchor="ctr">
+            <a:normAutofit/>
+          </a:bodyPr>
+          <a:lstStyle/>
+          <a:p>
+            <a:pPr algn="ctr" indent="0" marL="0">
+              <a:buNone/>
+            </a:pPr>
+            <a:r>
+              <a:rPr lang="en-US" sz="3600" b="1" dirty="0">
+                <a:solidFill>
+                  <a:srgbClr val="990011"/>
+                </a:solidFill>
+                <a:latin typeface="Times New Roman" pitchFamily="34" charset="0"/>
+                <a:ea typeface="Times New Roman" pitchFamily="34" charset="-122"/>
+                <a:cs typeface="Times New Roman" pitchFamily="34" charset="-120"/>
+              </a:rPr>
+              <a:t>Examples of Primary Activities</a:t>
+            </a:r>
+            <a:endParaRPr lang="en-US" sz="3600" dirty="0"/>
+          </a:p>
+        </p:txBody>
+      </p:sp>
+      <p:sp>
+        <p:nvSpPr>
+          <p:cNvPr id="4" name="Text 2"/>
+          <p:cNvSpPr/>
+          <p:nvPr/>
+        </p:nvSpPr>
+        <p:spPr>
+          <a:xfrm>
+            <a:off x="365760" y="1783080"/>
+            <a:ext cx="4846320" cy="4617720"/>
+          </a:xfrm>
+          <a:prstGeom prst="rect">
+            <a:avLst/>
+          </a:prstGeom>
+          <a:noFill/>
+          <a:ln/>
+        </p:spPr>
+        <p:txBody>
+          <a:bodyPr wrap="square" lIns="0" tIns="0" rIns="0" bIns="0" rtlCol="0" anchor="t"/>
+          <a:lstStyle/>
+          <a:p>
+            <a:pPr algn="l" marL="342900" indent="-342900">
+              <a:spcAft>
+                <a:spcPts val="800"/>
+              </a:spcAft>
+              <a:buSzPct val="100000"/>
+              <a:buChar char="•"/>
+            </a:pPr>
+            <a:r>
+              <a:rPr lang="en-US" sz="3600" b="1" dirty="0">
+                <a:solidFill>
+                  <a:srgbClr val="111111"/>
+                </a:solidFill>
+                <a:latin typeface="Times New Roman" pitchFamily="34" charset="0"/>
+                <a:ea typeface="Times New Roman" pitchFamily="34" charset="-122"/>
+                <a:cs typeface="Times New Roman" pitchFamily="34" charset="-120"/>
+              </a:rPr>
+              <a:t>Mining: </a:t>
+            </a:r>
+            <a:pPr algn="l" marL="342900" indent="-342900">
+              <a:spcAft>
+                <a:spcPts val="800"/>
+              </a:spcAft>
+              <a:buSzPct val="100000"/>
+              <a:buChar char="•"/>
+            </a:pPr>
+            <a:r>
+              <a:rPr lang="en-US" sz="3600" dirty="0">
+                <a:solidFill>
+                  <a:srgbClr val="111111"/>
+                </a:solidFill>
+                <a:latin typeface="Times New Roman" pitchFamily="34" charset="0"/>
+                <a:ea typeface="Times New Roman" pitchFamily="34" charset="-122"/>
+                <a:cs typeface="Times New Roman" pitchFamily="34" charset="-120"/>
+              </a:rPr>
+              <a:t>Oil near Kribi, gold in the East and limestone at Figuil.</a:t>
+            </a:r>
+            <a:endParaRPr lang="en-US" sz="3600" dirty="0"/>
+          </a:p>
+        </p:txBody>
+      </p:sp>
       <p:pic>
         <p:nvPicPr>
-          <p:cNvPr id="3" name="Image 0" descr="/home/claude/f4/img/minesec_sheet.png">    </p:cNvPr>
+          <p:cNvPr id="5" name="Image 0" descr="/home/claude/f4/img/v2/f2t_gold_mining.jpg">    </p:cNvPr>
           <p:cNvPicPr>
             <a:picLocks noChangeAspect="1"/>
           </p:cNvPicPr>
@@ -14269,8 +14417,8 @@
         </p:blipFill>
         <p:spPr>
           <a:xfrm>
-            <a:off x="0" y="658368"/>
-            <a:ext cx="5120640" cy="5833872"/>
+            <a:off x="5349240" y="2071212"/>
+            <a:ext cx="6659575" cy="3693983"/>
           </a:xfrm>
           <a:prstGeom prst="rect">
             <a:avLst/>
@@ -14279,14 +14427,14 @@
       </p:pic>
       <p:sp>
         <p:nvSpPr>
-          <p:cNvPr id="4" name="Text 1"/>
+          <p:cNvPr id="6" name="Text 3"/>
           <p:cNvSpPr/>
           <p:nvPr/>
         </p:nvSpPr>
         <p:spPr>
           <a:xfrm>
-            <a:off x="5349240" y="1005840"/>
-            <a:ext cx="6522415" cy="731520"/>
+            <a:off x="5349240" y="6089904"/>
+            <a:ext cx="6659575" cy="347472"/>
           </a:xfrm>
           <a:prstGeom prst="rect">
             <a:avLst/>
@@ -14295,85 +14443,24 @@
           <a:ln/>
         </p:spPr>
         <p:txBody>
-          <a:bodyPr wrap="square" lIns="0" tIns="0" rIns="0" bIns="0" rtlCol="0" anchor="ctr">
-            <a:normAutofit/>
-          </a:bodyPr>
+          <a:bodyPr wrap="square" lIns="0" tIns="0" rIns="0" bIns="0" rtlCol="0" anchor="ctr"/>
           <a:lstStyle/>
           <a:p>
             <a:pPr algn="ctr" indent="0" marL="0">
               <a:buNone/>
             </a:pPr>
             <a:r>
-              <a:rPr lang="en-US" sz="3600" b="1" dirty="0">
-                <a:solidFill>
-                  <a:srgbClr val="990011"/>
+              <a:rPr lang="en-US" sz="1600" i="1" dirty="0">
+                <a:solidFill>
+                  <a:srgbClr val="555555"/>
                 </a:solidFill>
                 <a:latin typeface="Times New Roman" pitchFamily="34" charset="0"/>
                 <a:ea typeface="Times New Roman" pitchFamily="34" charset="-122"/>
                 <a:cs typeface="Times New Roman" pitchFamily="34" charset="-120"/>
               </a:rPr>
-              <a:t>2. Importance of the Primary Sector (continued)</a:t>
-            </a:r>
-            <a:endParaRPr lang="en-US" sz="3600" dirty="0"/>
-          </a:p>
-        </p:txBody>
-      </p:sp>
-      <p:sp>
-        <p:nvSpPr>
-          <p:cNvPr id="5" name="Text 2"/>
-          <p:cNvSpPr/>
-          <p:nvPr/>
-        </p:nvSpPr>
-        <p:spPr>
-          <a:xfrm>
-            <a:off x="5349240" y="1783080"/>
-            <a:ext cx="6522415" cy="4663440"/>
-          </a:xfrm>
-          <a:prstGeom prst="rect">
-            <a:avLst/>
-          </a:prstGeom>
-          <a:noFill/>
-          <a:ln/>
-        </p:spPr>
-        <p:txBody>
-          <a:bodyPr wrap="square" lIns="0" tIns="0" rIns="0" bIns="0" rtlCol="0" anchor="t"/>
-          <a:lstStyle/>
-          <a:p>
-            <a:pPr algn="l" indent="0" marL="0">
-              <a:spcAft>
-                <a:spcPts val="800"/>
-              </a:spcAft>
-              <a:buNone/>
-            </a:pPr>
-            <a:r>
-              <a:rPr lang="en-US" sz="4000" b="1" dirty="0">
-                <a:solidFill>
-                  <a:srgbClr val="111111"/>
-                </a:solidFill>
-                <a:latin typeface="Times New Roman" pitchFamily="34" charset="0"/>
-                <a:ea typeface="Times New Roman" pitchFamily="34" charset="-122"/>
-                <a:cs typeface="Times New Roman" pitchFamily="34" charset="-120"/>
-              </a:rPr>
-              <a:t>Exports: </a:t>
-            </a:r>
-            <a:pPr algn="l" indent="0" marL="0">
-              <a:spcAft>
-                <a:spcPts val="800"/>
-              </a:spcAft>
-              <a:buNone/>
-            </a:pPr>
-            <a:r>
-              <a:rPr lang="en-US" sz="4000" dirty="0">
-                <a:solidFill>
-                  <a:srgbClr val="111111"/>
-                </a:solidFill>
-                <a:latin typeface="Times New Roman" pitchFamily="34" charset="0"/>
-                <a:ea typeface="Times New Roman" pitchFamily="34" charset="-122"/>
-                <a:cs typeface="Times New Roman" pitchFamily="34" charset="-120"/>
-              </a:rPr>
-              <a:t>Cameroon earns money by selling cocoa, cotton, timber and oil.</a:t>
-            </a:r>
-            <a:endParaRPr lang="en-US" sz="4000" dirty="0"/>
+              <a:t>Illustration: gold mining</a:t>
+            </a:r>
+            <a:endParaRPr lang="en-US" sz="1600" dirty="0"/>
           </a:p>
         </p:txBody>
       </p:sp>
@@ -14483,7 +14570,7 @@
                 <a:ea typeface="Calibri" pitchFamily="34" charset="-122"/>
                 <a:cs typeface="Calibri" pitchFamily="34" charset="-120"/>
               </a:rPr>
-              <a:t>FORMATIVE EVALUATION</a:t>
+              <a:t>BOARD SUMMARY</a:t>
             </a:r>
             <a:endParaRPr lang="en-US" sz="1400" dirty="0"/>
           </a:p>
@@ -14548,7 +14635,7 @@
                 <a:ea typeface="Times New Roman" pitchFamily="34" charset="-122"/>
                 <a:cs typeface="Times New Roman" pitchFamily="34" charset="-120"/>
               </a:rPr>
-              <a:t>Evaluation 1</a:t>
+              <a:t>Examples of Primary Activities</a:t>
             </a:r>
             <a:endParaRPr lang="en-US" sz="3600" dirty="0"/>
           </a:p>
@@ -14575,14 +14662,15 @@
           <a:bodyPr wrap="square" lIns="0" tIns="0" rIns="0" bIns="0" rtlCol="0" anchor="t"/>
           <a:lstStyle/>
           <a:p>
-            <a:pPr algn="l" indent="0" marL="0">
+            <a:pPr algn="l" marL="342900" indent="-342900">
               <a:spcAft>
                 <a:spcPts val="800"/>
               </a:spcAft>
-              <a:buNone/>
+              <a:buSzPct val="100000"/>
+              <a:buChar char="•"/>
             </a:pPr>
             <a:r>
-              <a:rPr lang="en-US" sz="4000" dirty="0">
+              <a:rPr lang="en-US" sz="4000" b="1" dirty="0">
                 <a:solidFill>
                   <a:srgbClr val="111111"/>
                 </a:solidFill>
@@ -14590,7 +14678,25 @@
                 <a:ea typeface="Times New Roman" pitchFamily="34" charset="-122"/>
                 <a:cs typeface="Times New Roman" pitchFamily="34" charset="-120"/>
               </a:rPr>
-              <a:t>What is the primary sector?</a:t>
+              <a:t>Hunting and gathering: </a:t>
+            </a:r>
+            <a:pPr algn="l" marL="342900" indent="-342900">
+              <a:spcAft>
+                <a:spcPts val="800"/>
+              </a:spcAft>
+              <a:buSzPct val="100000"/>
+              <a:buChar char="•"/>
+            </a:pPr>
+            <a:r>
+              <a:rPr lang="en-US" sz="4000" dirty="0">
+                <a:solidFill>
+                  <a:srgbClr val="111111"/>
+                </a:solidFill>
+                <a:latin typeface="Times New Roman" pitchFamily="34" charset="0"/>
+                <a:ea typeface="Times New Roman" pitchFamily="34" charset="-122"/>
+                <a:cs typeface="Times New Roman" pitchFamily="34" charset="-120"/>
+              </a:rPr>
+              <a:t>Game, honey and shea nuts.</a:t>
             </a:r>
             <a:endParaRPr lang="en-US" sz="4000" dirty="0"/>
           </a:p>
@@ -15006,7 +15112,7 @@
                 <a:ea typeface="Times New Roman" pitchFamily="34" charset="-122"/>
                 <a:cs typeface="Times New Roman" pitchFamily="34" charset="-120"/>
               </a:rPr>
-              <a:t>Expected Answer</a:t>
+              <a:t>Evaluation 1</a:t>
             </a:r>
             <a:endParaRPr lang="en-US" sz="3600" dirty="0"/>
           </a:p>
@@ -15048,7 +15154,7 @@
                 <a:ea typeface="Times New Roman" pitchFamily="34" charset="-122"/>
                 <a:cs typeface="Times New Roman" pitchFamily="34" charset="-120"/>
               </a:rPr>
-              <a:t>The sector that takes products from nature.</a:t>
+              <a:t>What is the primary sector?</a:t>
             </a:r>
             <a:endParaRPr lang="en-US" sz="4000" dirty="0"/>
           </a:p>
@@ -15225,7 +15331,7 @@
                 <a:ea typeface="Times New Roman" pitchFamily="34" charset="-122"/>
                 <a:cs typeface="Times New Roman" pitchFamily="34" charset="-120"/>
               </a:rPr>
-              <a:t>Evaluation 2</a:t>
+              <a:t>Expected Answer</a:t>
             </a:r>
             <a:endParaRPr lang="en-US" sz="3600" dirty="0"/>
           </a:p>
@@ -15267,7 +15373,7 @@
                 <a:ea typeface="Times New Roman" pitchFamily="34" charset="-122"/>
                 <a:cs typeface="Times New Roman" pitchFamily="34" charset="-120"/>
               </a:rPr>
-              <a:t>Give three primary activities.</a:t>
+              <a:t>The sector that takes products from nature.</a:t>
             </a:r>
             <a:endParaRPr lang="en-US" sz="4000" dirty="0"/>
           </a:p>
@@ -15444,7 +15550,7 @@
                 <a:ea typeface="Times New Roman" pitchFamily="34" charset="-122"/>
                 <a:cs typeface="Times New Roman" pitchFamily="34" charset="-120"/>
               </a:rPr>
-              <a:t>Expected Answer</a:t>
+              <a:t>Evaluation 2</a:t>
             </a:r>
             <a:endParaRPr lang="en-US" sz="3600" dirty="0"/>
           </a:p>
@@ -15486,7 +15592,7 @@
                 <a:ea typeface="Times New Roman" pitchFamily="34" charset="-122"/>
                 <a:cs typeface="Times New Roman" pitchFamily="34" charset="-120"/>
               </a:rPr>
-              <a:t>Farming, fishing and mining (also rearing, forestry).</a:t>
+              <a:t>Give three primary activities.</a:t>
             </a:r>
             <a:endParaRPr lang="en-US" sz="4000" dirty="0"/>
           </a:p>
@@ -15598,7 +15704,7 @@
                 <a:ea typeface="Calibri" pitchFamily="34" charset="-122"/>
                 <a:cs typeface="Calibri" pitchFamily="34" charset="-120"/>
               </a:rPr>
-              <a:t>REMEDIATION</a:t>
+              <a:t>FORMATIVE EVALUATION</a:t>
             </a:r>
             <a:endParaRPr lang="en-US" sz="1400" dirty="0"/>
           </a:p>
@@ -15621,7 +15727,7 @@
         <p:spPr>
           <a:xfrm>
             <a:off x="0" y="658368"/>
-            <a:ext cx="1463040" cy="5833872"/>
+            <a:ext cx="5120640" cy="5833872"/>
           </a:xfrm>
           <a:prstGeom prst="rect">
             <a:avLst/>
@@ -15636,8 +15742,8 @@
         </p:nvSpPr>
         <p:spPr>
           <a:xfrm>
-            <a:off x="1691640" y="1005840"/>
-            <a:ext cx="10180015" cy="731520"/>
+            <a:off x="5349240" y="1005840"/>
+            <a:ext cx="6522415" cy="731520"/>
           </a:xfrm>
           <a:prstGeom prst="rect">
             <a:avLst/>
@@ -15663,7 +15769,7 @@
                 <a:ea typeface="Times New Roman" pitchFamily="34" charset="-122"/>
                 <a:cs typeface="Times New Roman" pitchFamily="34" charset="-120"/>
               </a:rPr>
-              <a:t>Remediation</a:t>
+              <a:t>Expected Answer</a:t>
             </a:r>
             <a:endParaRPr lang="en-US" sz="3600" dirty="0"/>
           </a:p>
@@ -15677,8 +15783,8 @@
         </p:nvSpPr>
         <p:spPr>
           <a:xfrm>
-            <a:off x="1691640" y="1783080"/>
-            <a:ext cx="10180015" cy="4663440"/>
+            <a:off x="5349240" y="1783080"/>
+            <a:ext cx="6522415" cy="4663440"/>
           </a:xfrm>
           <a:prstGeom prst="rect">
             <a:avLst/>
@@ -15697,7 +15803,7 @@
               <a:buNone/>
             </a:pPr>
             <a:r>
-              <a:rPr lang="en-US" sz="4000" b="1" dirty="0">
+              <a:rPr lang="en-US" sz="4000" dirty="0">
                 <a:solidFill>
                   <a:srgbClr val="111111"/>
                 </a:solidFill>
@@ -15705,73 +15811,7 @@
                 <a:ea typeface="Times New Roman" pitchFamily="34" charset="-122"/>
                 <a:cs typeface="Times New Roman" pitchFamily="34" charset="-120"/>
               </a:rPr>
-              <a:t>Fill in the blanks:</a:t>
-            </a:r>
-            <a:endParaRPr lang="en-US" sz="4000" dirty="0"/>
-          </a:p>
-          <a:p>
-            <a:pPr algn="l" marL="342900" indent="-342900">
-              <a:spcAft>
-                <a:spcPts val="800"/>
-              </a:spcAft>
-              <a:buSzPct val="100000"/>
-              <a:buFont typeface="+mj-lt"/>
-              <a:buAutoNum type="arabicPeriod" startAt="1"/>
-            </a:pPr>
-            <a:r>
-              <a:rPr lang="en-US" sz="4000" dirty="0">
-                <a:solidFill>
-                  <a:srgbClr val="111111"/>
-                </a:solidFill>
-                <a:latin typeface="Times New Roman" pitchFamily="34" charset="0"/>
-                <a:ea typeface="Times New Roman" pitchFamily="34" charset="-122"/>
-                <a:cs typeface="Times New Roman" pitchFamily="34" charset="-120"/>
-              </a:rPr>
-              <a:t>Taking products from nature is the ______ sector.</a:t>
-            </a:r>
-            <a:endParaRPr lang="en-US" sz="4000" dirty="0"/>
-          </a:p>
-          <a:p>
-            <a:pPr algn="l" marL="342900" indent="-342900">
-              <a:spcAft>
-                <a:spcPts val="800"/>
-              </a:spcAft>
-              <a:buSzPct val="100000"/>
-              <a:buFont typeface="+mj-lt"/>
-              <a:buAutoNum type="arabicPeriod" startAt="1"/>
-            </a:pPr>
-            <a:r>
-              <a:rPr lang="en-US" sz="4000" dirty="0">
-                <a:solidFill>
-                  <a:srgbClr val="111111"/>
-                </a:solidFill>
-                <a:latin typeface="Times New Roman" pitchFamily="34" charset="0"/>
-                <a:ea typeface="Times New Roman" pitchFamily="34" charset="-122"/>
-                <a:cs typeface="Times New Roman" pitchFamily="34" charset="-120"/>
-              </a:rPr>
-              <a:t>Taking minerals from the ground is called ______.</a:t>
-            </a:r>
-            <a:endParaRPr lang="en-US" sz="4000" dirty="0"/>
-          </a:p>
-          <a:p>
-            <a:pPr algn="l" marL="342900" indent="-342900">
-              <a:spcAft>
-                <a:spcPts val="800"/>
-              </a:spcAft>
-              <a:buSzPct val="100000"/>
-              <a:buFont typeface="+mj-lt"/>
-              <a:buAutoNum type="arabicPeriod" startAt="1"/>
-            </a:pPr>
-            <a:r>
-              <a:rPr lang="en-US" sz="4000" dirty="0">
-                <a:solidFill>
-                  <a:srgbClr val="111111"/>
-                </a:solidFill>
-                <a:latin typeface="Times New Roman" pitchFamily="34" charset="0"/>
-                <a:ea typeface="Times New Roman" pitchFamily="34" charset="-122"/>
-                <a:cs typeface="Times New Roman" pitchFamily="34" charset="-120"/>
-              </a:rPr>
-              <a:t>Cutting trees for timber is called ______.</a:t>
+              <a:t>Farming, fishing and mining (also rearing, forestry).</a:t>
             </a:r>
             <a:endParaRPr lang="en-US" sz="4000" dirty="0"/>
           </a:p>
@@ -15883,7 +15923,7 @@
                 <a:ea typeface="Calibri" pitchFamily="34" charset="-122"/>
                 <a:cs typeface="Calibri" pitchFamily="34" charset="-120"/>
               </a:rPr>
-              <a:t>HOMEWORK</a:t>
+              <a:t>REMEDIATION</a:t>
             </a:r>
             <a:endParaRPr lang="en-US" sz="1400" dirty="0"/>
           </a:p>
@@ -15906,7 +15946,7 @@
         <p:spPr>
           <a:xfrm>
             <a:off x="0" y="658368"/>
-            <a:ext cx="5120640" cy="5833872"/>
+            <a:ext cx="1463040" cy="5833872"/>
           </a:xfrm>
           <a:prstGeom prst="rect">
             <a:avLst/>
@@ -15921,8 +15961,8 @@
         </p:nvSpPr>
         <p:spPr>
           <a:xfrm>
-            <a:off x="5349240" y="1005840"/>
-            <a:ext cx="6522415" cy="731520"/>
+            <a:off x="1691640" y="1005840"/>
+            <a:ext cx="10180015" cy="731520"/>
           </a:xfrm>
           <a:prstGeom prst="rect">
             <a:avLst/>
@@ -15948,7 +15988,7 @@
                 <a:ea typeface="Times New Roman" pitchFamily="34" charset="-122"/>
                 <a:cs typeface="Times New Roman" pitchFamily="34" charset="-120"/>
               </a:rPr>
-              <a:t>Homework</a:t>
+              <a:t>Remediation</a:t>
             </a:r>
             <a:endParaRPr lang="en-US" sz="3600" dirty="0"/>
           </a:p>
@@ -15962,8 +16002,8 @@
         </p:nvSpPr>
         <p:spPr>
           <a:xfrm>
-            <a:off x="5349240" y="1783080"/>
-            <a:ext cx="6522415" cy="4663440"/>
+            <a:off x="1691640" y="1783080"/>
+            <a:ext cx="10180015" cy="4663440"/>
           </a:xfrm>
           <a:prstGeom prst="rect">
             <a:avLst/>
@@ -15982,7 +16022,7 @@
               <a:buNone/>
             </a:pPr>
             <a:r>
-              <a:rPr lang="en-US" sz="4000" dirty="0">
+              <a:rPr lang="en-US" sz="4000" b="1" dirty="0">
                 <a:solidFill>
                   <a:srgbClr val="111111"/>
                 </a:solidFill>
@@ -15990,7 +16030,73 @@
                 <a:ea typeface="Times New Roman" pitchFamily="34" charset="-122"/>
                 <a:cs typeface="Times New Roman" pitchFamily="34" charset="-120"/>
               </a:rPr>
-              <a:t>Find the names of two factories in Cameroon, and write what each one produces.</a:t>
+              <a:t>Fill in the blanks:</a:t>
+            </a:r>
+            <a:endParaRPr lang="en-US" sz="4000" dirty="0"/>
+          </a:p>
+          <a:p>
+            <a:pPr algn="l" marL="342900" indent="-342900">
+              <a:spcAft>
+                <a:spcPts val="800"/>
+              </a:spcAft>
+              <a:buSzPct val="100000"/>
+              <a:buFont typeface="+mj-lt"/>
+              <a:buAutoNum type="arabicPeriod" startAt="1"/>
+            </a:pPr>
+            <a:r>
+              <a:rPr lang="en-US" sz="4000" dirty="0">
+                <a:solidFill>
+                  <a:srgbClr val="111111"/>
+                </a:solidFill>
+                <a:latin typeface="Times New Roman" pitchFamily="34" charset="0"/>
+                <a:ea typeface="Times New Roman" pitchFamily="34" charset="-122"/>
+                <a:cs typeface="Times New Roman" pitchFamily="34" charset="-120"/>
+              </a:rPr>
+              <a:t>Taking products from nature is the ______ sector.</a:t>
+            </a:r>
+            <a:endParaRPr lang="en-US" sz="4000" dirty="0"/>
+          </a:p>
+          <a:p>
+            <a:pPr algn="l" marL="342900" indent="-342900">
+              <a:spcAft>
+                <a:spcPts val="800"/>
+              </a:spcAft>
+              <a:buSzPct val="100000"/>
+              <a:buFont typeface="+mj-lt"/>
+              <a:buAutoNum type="arabicPeriod" startAt="1"/>
+            </a:pPr>
+            <a:r>
+              <a:rPr lang="en-US" sz="4000" dirty="0">
+                <a:solidFill>
+                  <a:srgbClr val="111111"/>
+                </a:solidFill>
+                <a:latin typeface="Times New Roman" pitchFamily="34" charset="0"/>
+                <a:ea typeface="Times New Roman" pitchFamily="34" charset="-122"/>
+                <a:cs typeface="Times New Roman" pitchFamily="34" charset="-120"/>
+              </a:rPr>
+              <a:t>Taking minerals from the ground is called ______.</a:t>
+            </a:r>
+            <a:endParaRPr lang="en-US" sz="4000" dirty="0"/>
+          </a:p>
+          <a:p>
+            <a:pPr algn="l" marL="342900" indent="-342900">
+              <a:spcAft>
+                <a:spcPts val="800"/>
+              </a:spcAft>
+              <a:buSzPct val="100000"/>
+              <a:buFont typeface="+mj-lt"/>
+              <a:buAutoNum type="arabicPeriod" startAt="1"/>
+            </a:pPr>
+            <a:r>
+              <a:rPr lang="en-US" sz="4000" dirty="0">
+                <a:solidFill>
+                  <a:srgbClr val="111111"/>
+                </a:solidFill>
+                <a:latin typeface="Times New Roman" pitchFamily="34" charset="0"/>
+                <a:ea typeface="Times New Roman" pitchFamily="34" charset="-122"/>
+                <a:cs typeface="Times New Roman" pitchFamily="34" charset="-120"/>
+              </a:rPr>
+              <a:t>Cutting trees for timber is called ______.</a:t>
             </a:r>
             <a:endParaRPr lang="en-US" sz="4000" dirty="0"/>
           </a:p>
@@ -16102,7 +16208,7 @@
                 <a:ea typeface="Calibri" pitchFamily="34" charset="-122"/>
                 <a:cs typeface="Calibri" pitchFamily="34" charset="-120"/>
               </a:rPr>
-              <a:t>NEXT LESSON</a:t>
+              <a:t>HOMEWORK</a:t>
             </a:r>
             <a:endParaRPr lang="en-US" sz="1400" dirty="0"/>
           </a:p>
@@ -16167,7 +16273,7 @@
                 <a:ea typeface="Times New Roman" pitchFamily="34" charset="-122"/>
                 <a:cs typeface="Times New Roman" pitchFamily="34" charset="-120"/>
               </a:rPr>
-              <a:t>Next Lesson</a:t>
+              <a:t>Homework</a:t>
             </a:r>
             <a:endParaRPr lang="en-US" sz="3600" dirty="0"/>
           </a:p>
@@ -16191,17 +16297,17 @@
           <a:ln/>
         </p:spPr>
         <p:txBody>
-          <a:bodyPr wrap="square" lIns="0" tIns="0" rIns="0" bIns="0" rtlCol="0" anchor="ctr"/>
-          <a:lstStyle/>
-          <a:p>
-            <a:pPr algn="ctr" indent="0" marL="0">
+          <a:bodyPr wrap="square" lIns="0" tIns="0" rIns="0" bIns="0" rtlCol="0" anchor="t"/>
+          <a:lstStyle/>
+          <a:p>
+            <a:pPr algn="l" indent="0" marL="0">
               <a:spcAft>
                 <a:spcPts val="800"/>
               </a:spcAft>
               <a:buNone/>
             </a:pPr>
             <a:r>
-              <a:rPr lang="en-US" sz="4000" b="1" dirty="0">
+              <a:rPr lang="en-US" sz="4000" dirty="0">
                 <a:solidFill>
                   <a:srgbClr val="111111"/>
                 </a:solidFill>
@@ -16209,27 +16315,7 @@
                 <a:ea typeface="Times New Roman" pitchFamily="34" charset="-122"/>
                 <a:cs typeface="Times New Roman" pitchFamily="34" charset="-120"/>
               </a:rPr>
-              <a:t>Our next lesson will be on:</a:t>
-            </a:r>
-            <a:endParaRPr lang="en-US" sz="4000" dirty="0"/>
-          </a:p>
-          <a:p>
-            <a:pPr algn="ctr" indent="0" marL="0">
-              <a:spcAft>
-                <a:spcPts val="800"/>
-              </a:spcAft>
-              <a:buNone/>
-            </a:pPr>
-            <a:r>
-              <a:rPr lang="en-US" sz="4000" b="1" dirty="0">
-                <a:solidFill>
-                  <a:srgbClr val="990011"/>
-                </a:solidFill>
-                <a:latin typeface="Times New Roman" pitchFamily="34" charset="0"/>
-                <a:ea typeface="Times New Roman" pitchFamily="34" charset="-122"/>
-                <a:cs typeface="Times New Roman" pitchFamily="34" charset="-120"/>
-              </a:rPr>
-              <a:t>Lesson 5 (Part 4): The Sectors of the Economy: The Secondary Sector (Definition and Examples)</a:t>
+              <a:t>Find the names of two factories in Cameroon, and write what each one produces.</a:t>
             </a:r>
             <a:endParaRPr lang="en-US" sz="4000" dirty="0"/>
           </a:p>
@@ -16341,6 +16427,245 @@
                 <a:ea typeface="Calibri" pitchFamily="34" charset="-122"/>
                 <a:cs typeface="Calibri" pitchFamily="34" charset="-120"/>
               </a:rPr>
+              <a:t>NEXT LESSON</a:t>
+            </a:r>
+            <a:endParaRPr lang="en-US" sz="1400" dirty="0"/>
+          </a:p>
+        </p:txBody>
+      </p:sp>
+      <p:pic>
+        <p:nvPicPr>
+          <p:cNvPr id="3" name="Image 0" descr="/home/claude/f4/img/minesec_sheet.png">    </p:cNvPr>
+          <p:cNvPicPr>
+            <a:picLocks noChangeAspect="1"/>
+          </p:cNvPicPr>
+          <p:nvPr/>
+        </p:nvPicPr>
+        <p:blipFill>
+          <a:blip r:embed="rId1"/>
+          <a:stretch>
+            <a:fillRect/>
+          </a:stretch>
+        </p:blipFill>
+        <p:spPr>
+          <a:xfrm>
+            <a:off x="0" y="658368"/>
+            <a:ext cx="5120640" cy="5833872"/>
+          </a:xfrm>
+          <a:prstGeom prst="rect">
+            <a:avLst/>
+          </a:prstGeom>
+        </p:spPr>
+      </p:pic>
+      <p:sp>
+        <p:nvSpPr>
+          <p:cNvPr id="4" name="Text 1"/>
+          <p:cNvSpPr/>
+          <p:nvPr/>
+        </p:nvSpPr>
+        <p:spPr>
+          <a:xfrm>
+            <a:off x="5349240" y="1005840"/>
+            <a:ext cx="6522415" cy="731520"/>
+          </a:xfrm>
+          <a:prstGeom prst="rect">
+            <a:avLst/>
+          </a:prstGeom>
+          <a:noFill/>
+          <a:ln/>
+        </p:spPr>
+        <p:txBody>
+          <a:bodyPr wrap="square" lIns="0" tIns="0" rIns="0" bIns="0" rtlCol="0" anchor="ctr">
+            <a:normAutofit/>
+          </a:bodyPr>
+          <a:lstStyle/>
+          <a:p>
+            <a:pPr algn="ctr" indent="0" marL="0">
+              <a:buNone/>
+            </a:pPr>
+            <a:r>
+              <a:rPr lang="en-US" sz="3600" b="1" dirty="0">
+                <a:solidFill>
+                  <a:srgbClr val="990011"/>
+                </a:solidFill>
+                <a:latin typeface="Times New Roman" pitchFamily="34" charset="0"/>
+                <a:ea typeface="Times New Roman" pitchFamily="34" charset="-122"/>
+                <a:cs typeface="Times New Roman" pitchFamily="34" charset="-120"/>
+              </a:rPr>
+              <a:t>Next Lesson</a:t>
+            </a:r>
+            <a:endParaRPr lang="en-US" sz="3600" dirty="0"/>
+          </a:p>
+        </p:txBody>
+      </p:sp>
+      <p:sp>
+        <p:nvSpPr>
+          <p:cNvPr id="5" name="Text 2"/>
+          <p:cNvSpPr/>
+          <p:nvPr/>
+        </p:nvSpPr>
+        <p:spPr>
+          <a:xfrm>
+            <a:off x="5349240" y="1783080"/>
+            <a:ext cx="6522415" cy="4663440"/>
+          </a:xfrm>
+          <a:prstGeom prst="rect">
+            <a:avLst/>
+          </a:prstGeom>
+          <a:noFill/>
+          <a:ln/>
+        </p:spPr>
+        <p:txBody>
+          <a:bodyPr wrap="square" lIns="0" tIns="0" rIns="0" bIns="0" rtlCol="0" anchor="ctr"/>
+          <a:lstStyle/>
+          <a:p>
+            <a:pPr algn="ctr" indent="0" marL="0">
+              <a:spcAft>
+                <a:spcPts val="800"/>
+              </a:spcAft>
+              <a:buNone/>
+            </a:pPr>
+            <a:r>
+              <a:rPr lang="en-US" sz="4000" b="1" dirty="0">
+                <a:solidFill>
+                  <a:srgbClr val="111111"/>
+                </a:solidFill>
+                <a:latin typeface="Times New Roman" pitchFamily="34" charset="0"/>
+                <a:ea typeface="Times New Roman" pitchFamily="34" charset="-122"/>
+                <a:cs typeface="Times New Roman" pitchFamily="34" charset="-120"/>
+              </a:rPr>
+              <a:t>Our next lesson will be on:</a:t>
+            </a:r>
+            <a:endParaRPr lang="en-US" sz="4000" dirty="0"/>
+          </a:p>
+          <a:p>
+            <a:pPr algn="ctr" indent="0" marL="0">
+              <a:spcAft>
+                <a:spcPts val="800"/>
+              </a:spcAft>
+              <a:buNone/>
+            </a:pPr>
+            <a:r>
+              <a:rPr lang="en-US" sz="4000" b="1" dirty="0">
+                <a:solidFill>
+                  <a:srgbClr val="990011"/>
+                </a:solidFill>
+                <a:latin typeface="Times New Roman" pitchFamily="34" charset="0"/>
+                <a:ea typeface="Times New Roman" pitchFamily="34" charset="-122"/>
+                <a:cs typeface="Times New Roman" pitchFamily="34" charset="-120"/>
+              </a:rPr>
+              <a:t>Lesson 5 (Part 4): The Sectors of the Economy: The Secondary Sector (Definition and Examples)</a:t>
+            </a:r>
+            <a:endParaRPr lang="en-US" sz="4000" dirty="0"/>
+          </a:p>
+        </p:txBody>
+      </p:sp>
+      <p:sp>
+        <p:nvSpPr>
+          <p:cNvPr id="25" name="Slide Number Placeholder 0"/>
+          <p:cNvSpPr>
+            <a:spLocks noGrp="1"/>
+          </p:cNvSpPr>
+          <p:nvPr>
+            <p:ph type="sldNum" sz="quarter" idx="4294967295"/>
+          </p:nvPr>
+        </p:nvSpPr>
+        <p:spPr>
+          <a:xfrm>
+            <a:off x="27432" y="91440"/>
+            <a:ext cx="585216" cy="475488"/>
+          </a:xfrm>
+          <a:prstGeom prst="rect">
+            <a:avLst/>
+          </a:prstGeom>
+          <a:extLst>
+            <a:ext uri="{C572A759-6A51-4108-AA02-DFA0A04FC94B}">
+              <ma14:wrappingTextBoxFlag xmlns:ma14="http://schemas.microsoft.com/office/mac/drawingml/2011/main" val="0"/>
+            </a:ext>
+          </a:extLst>
+        </p:spPr>
+        <p:txBody>
+          <a:bodyPr/>
+          <a:lstStyle>
+            <a:lvl1pPr>
+              <a:defRPr sz="2000">
+                <a:solidFill>
+                  <a:srgbClr val="FFFFFF"/>
+                </a:solidFill>
+                <a:latin typeface="Calibri"/>
+                <a:ea typeface="Calibri"/>
+                <a:cs typeface="Calibri"/>
+              </a:defRPr>
+            </a:lvl1pPr>
+          </a:lstStyle>
+          <a:p>
+            <a:pPr algn="ctr"/>
+            <a:fld id="{F7021451-1387-4CA6-816F-3879F97B5CBC}" type="slidenum">
+              <a:rPr b="1" lang="en-US"/>
+              <a:t>46</a:t>
+            </a:fld>
+            <a:endParaRPr lang="en-US"/>
+          </a:p>
+        </p:txBody>
+      </p:sp>
+    </p:spTree>
+  </p:cSld>
+  <p:clrMapOvr>
+    <a:masterClrMapping/>
+  </p:clrMapOvr>
+</p:sld>
+</file>
+
+<file path=ppt/slides/slide47.xml><?xml version="1.0" encoding="utf-8"?>
+<p:sld xmlns:a="http://schemas.openxmlformats.org/drawingml/2006/main" xmlns:r="http://schemas.openxmlformats.org/officeDocument/2006/relationships" xmlns:p="http://schemas.openxmlformats.org/presentationml/2006/main">
+  <p:cSld name="Slide 47">
+    <p:spTree>
+      <p:nvGrpSpPr>
+        <p:cNvPr id="1" name=""/>
+        <p:cNvGrpSpPr/>
+        <p:nvPr/>
+      </p:nvGrpSpPr>
+      <p:grpSpPr>
+        <a:xfrm>
+          <a:off x="0" y="0"/>
+          <a:ext cx="0" cy="0"/>
+          <a:chOff x="0" y="0"/>
+          <a:chExt cx="0" cy="0"/>
+        </a:xfrm>
+      </p:grpSpPr>
+      <p:sp>
+        <p:nvSpPr>
+          <p:cNvPr id="2" name="Text 0"/>
+          <p:cNvSpPr/>
+          <p:nvPr/>
+        </p:nvSpPr>
+        <p:spPr>
+          <a:xfrm>
+            <a:off x="457200" y="713232"/>
+            <a:ext cx="11368735" cy="274320"/>
+          </a:xfrm>
+          <a:prstGeom prst="rect">
+            <a:avLst/>
+          </a:prstGeom>
+          <a:noFill/>
+          <a:ln/>
+        </p:spPr>
+        <p:txBody>
+          <a:bodyPr wrap="square" lIns="0" tIns="0" rIns="0" bIns="0" rtlCol="0" anchor="ctr"/>
+          <a:lstStyle/>
+          <a:p>
+            <a:pPr algn="r" indent="0" marL="0">
+              <a:buNone/>
+            </a:pPr>
+            <a:r>
+              <a:rPr lang="en-US" sz="1400" b="1" dirty="0">
+                <a:solidFill>
+                  <a:srgbClr val="1C3F6E"/>
+                </a:solidFill>
+                <a:latin typeface="Calibri" pitchFamily="34" charset="0"/>
+                <a:ea typeface="Calibri" pitchFamily="34" charset="-122"/>
+                <a:cs typeface="Calibri" pitchFamily="34" charset="-120"/>
+              </a:rPr>
               <a:t>BILINGUAL GAME</a:t>
             </a:r>
             <a:endParaRPr lang="en-US" sz="1400" dirty="0"/>
@@ -16388,7 +16713,7 @@
       </p:sp>
       <p:graphicFrame>
         <p:nvGraphicFramePr>
-          <p:cNvPr id="47" name="Table 0"/>
+          <p:cNvPr id="48" name="Table 0"/>
           <p:cNvGraphicFramePr>
             <a:graphicFrameLocks noGrp="1"/>
           </p:cNvGraphicFramePr>
@@ -17700,7 +18025,7 @@
             <a:pPr algn="ctr"/>
             <a:fld id="{F7021451-1387-4CA6-816F-3879F97B5CBC}" type="slidenum">
               <a:rPr b="1" lang="en-US"/>
-              <a:t>46</a:t>
+              <a:t>47</a:t>
             </a:fld>
             <a:endParaRPr lang="en-US"/>
           </a:p>
@@ -17714,9 +18039,9 @@
 </p:sld>
 </file>
 
-<file path=ppt/slides/slide47.xml><?xml version="1.0" encoding="utf-8"?>
+<file path=ppt/slides/slide48.xml><?xml version="1.0" encoding="utf-8"?>
 <p:sld xmlns:a="http://schemas.openxmlformats.org/drawingml/2006/main" xmlns:r="http://schemas.openxmlformats.org/officeDocument/2006/relationships" xmlns:p="http://schemas.openxmlformats.org/presentationml/2006/main">
-  <p:cSld name="Slide 47">
+  <p:cSld name="Slide 48">
     <p:spTree>
       <p:nvGrpSpPr>
         <p:cNvPr id="1" name=""/>
@@ -17811,7 +18136,7 @@
       </p:sp>
       <p:graphicFrame>
         <p:nvGraphicFramePr>
-          <p:cNvPr id="48" name="Table 0"/>
+          <p:cNvPr id="49" name="Table 0"/>
           <p:cNvGraphicFramePr>
             <a:graphicFrameLocks noGrp="1"/>
           </p:cNvGraphicFramePr>
@@ -18433,7 +18758,7 @@
             <a:pPr algn="ctr"/>
             <a:fld id="{F7021451-1387-4CA6-816F-3879F97B5CBC}" type="slidenum">
               <a:rPr b="1" lang="en-US"/>
-              <a:t>47</a:t>
+              <a:t>48</a:t>
             </a:fld>
             <a:endParaRPr lang="en-US"/>
           </a:p>
@@ -18447,9 +18772,9 @@
 </p:sld>
 </file>
 
-<file path=ppt/slides/slide48.xml><?xml version="1.0" encoding="utf-8"?>
+<file path=ppt/slides/slide49.xml><?xml version="1.0" encoding="utf-8"?>
 <p:sld xmlns:a="http://schemas.openxmlformats.org/drawingml/2006/main" xmlns:r="http://schemas.openxmlformats.org/officeDocument/2006/relationships" xmlns:p="http://schemas.openxmlformats.org/presentationml/2006/main">
-  <p:cSld name="Slide 48">
+  <p:cSld name="Slide 49">
     <p:spTree>
       <p:nvGrpSpPr>
         <p:cNvPr id="1" name=""/>
@@ -18544,7 +18869,7 @@
       </p:sp>
       <p:graphicFrame>
         <p:nvGraphicFramePr>
-          <p:cNvPr id="49" name="Table 0"/>
+          <p:cNvPr id="50" name="Table 0"/>
           <p:cNvGraphicFramePr>
             <a:graphicFrameLocks noGrp="1"/>
           </p:cNvGraphicFramePr>
@@ -18654,7 +18979,7 @@
                           <a:ea typeface="Calibri" pitchFamily="34" charset="-122"/>
                           <a:cs typeface="Calibri" pitchFamily="34" charset="-120"/>
                         </a:rPr>
-                        <a:t>DEFINITIONS; Examples of the Primary Sector; Importance of the Primary Sector.</a:t>
+                        <a:t>DEFINITIONS; Examples of Primary Activities.</a:t>
                       </a:r>
                       <a:endParaRPr lang="en-US" sz="1600" dirty="0">
                         <a:latin typeface="Calibri" charset="0"/>
@@ -19304,331 +19629,6 @@
             <a:pPr algn="ctr"/>
             <a:fld id="{F7021451-1387-4CA6-816F-3879F97B5CBC}" type="slidenum">
               <a:rPr b="1" lang="en-US"/>
-              <a:t>48</a:t>
-            </a:fld>
-            <a:endParaRPr lang="en-US"/>
-          </a:p>
-        </p:txBody>
-      </p:sp>
-    </p:spTree>
-  </p:cSld>
-  <p:clrMapOvr>
-    <a:masterClrMapping/>
-  </p:clrMapOvr>
-</p:sld>
-</file>
-
-<file path=ppt/slides/slide49.xml><?xml version="1.0" encoding="utf-8"?>
-<p:sld xmlns:a="http://schemas.openxmlformats.org/drawingml/2006/main" xmlns:r="http://schemas.openxmlformats.org/officeDocument/2006/relationships" xmlns:p="http://schemas.openxmlformats.org/presentationml/2006/main">
-  <p:cSld name="Slide 49">
-    <p:spTree>
-      <p:nvGrpSpPr>
-        <p:cNvPr id="1" name=""/>
-        <p:cNvGrpSpPr/>
-        <p:nvPr/>
-      </p:nvGrpSpPr>
-      <p:grpSpPr>
-        <a:xfrm>
-          <a:off x="0" y="0"/>
-          <a:ext cx="0" cy="0"/>
-          <a:chOff x="0" y="0"/>
-          <a:chExt cx="0" cy="0"/>
-        </a:xfrm>
-      </p:grpSpPr>
-      <p:sp>
-        <p:nvSpPr>
-          <p:cNvPr id="2" name="Text 0"/>
-          <p:cNvSpPr/>
-          <p:nvPr/>
-        </p:nvSpPr>
-        <p:spPr>
-          <a:xfrm>
-            <a:off x="457200" y="713232"/>
-            <a:ext cx="11368735" cy="274320"/>
-          </a:xfrm>
-          <a:prstGeom prst="rect">
-            <a:avLst/>
-          </a:prstGeom>
-          <a:noFill/>
-          <a:ln/>
-        </p:spPr>
-        <p:txBody>
-          <a:bodyPr wrap="square" lIns="0" tIns="0" rIns="0" bIns="0" rtlCol="0" anchor="ctr"/>
-          <a:lstStyle/>
-          <a:p>
-            <a:pPr algn="r" indent="0" marL="0">
-              <a:buNone/>
-            </a:pPr>
-            <a:r>
-              <a:rPr lang="en-US" sz="1400" b="1" dirty="0">
-                <a:solidFill>
-                  <a:srgbClr val="1C3F6E"/>
-                </a:solidFill>
-                <a:latin typeface="Calibri" pitchFamily="34" charset="0"/>
-                <a:ea typeface="Calibri" pitchFamily="34" charset="-122"/>
-                <a:cs typeface="Calibri" pitchFamily="34" charset="-120"/>
-              </a:rPr>
-              <a:t>TEACHER'S NOTE</a:t>
-            </a:r>
-            <a:endParaRPr lang="en-US" sz="1400" dirty="0"/>
-          </a:p>
-        </p:txBody>
-      </p:sp>
-      <p:pic>
-        <p:nvPicPr>
-          <p:cNvPr id="3" name="Image 0" descr="/home/claude/f4/img/minesec_sheet.png">    </p:cNvPr>
-          <p:cNvPicPr>
-            <a:picLocks noChangeAspect="1"/>
-          </p:cNvPicPr>
-          <p:nvPr/>
-        </p:nvPicPr>
-        <p:blipFill>
-          <a:blip r:embed="rId1"/>
-          <a:stretch>
-            <a:fillRect/>
-          </a:stretch>
-        </p:blipFill>
-        <p:spPr>
-          <a:xfrm>
-            <a:off x="0" y="658368"/>
-            <a:ext cx="2468880" cy="5833872"/>
-          </a:xfrm>
-          <a:prstGeom prst="rect">
-            <a:avLst/>
-          </a:prstGeom>
-        </p:spPr>
-      </p:pic>
-      <p:sp>
-        <p:nvSpPr>
-          <p:cNvPr id="4" name="Text 1"/>
-          <p:cNvSpPr/>
-          <p:nvPr/>
-        </p:nvSpPr>
-        <p:spPr>
-          <a:xfrm>
-            <a:off x="2697480" y="1005840"/>
-            <a:ext cx="9174175" cy="731520"/>
-          </a:xfrm>
-          <a:prstGeom prst="rect">
-            <a:avLst/>
-          </a:prstGeom>
-          <a:noFill/>
-          <a:ln/>
-        </p:spPr>
-        <p:txBody>
-          <a:bodyPr wrap="square" lIns="0" tIns="0" rIns="0" bIns="0" rtlCol="0" anchor="ctr">
-            <a:normAutofit/>
-          </a:bodyPr>
-          <a:lstStyle/>
-          <a:p>
-            <a:pPr algn="ctr" indent="0" marL="0">
-              <a:buNone/>
-            </a:pPr>
-            <a:r>
-              <a:rPr lang="en-US" sz="3600" b="1" dirty="0">
-                <a:solidFill>
-                  <a:srgbClr val="990011"/>
-                </a:solidFill>
-                <a:latin typeface="Times New Roman" pitchFamily="34" charset="0"/>
-                <a:ea typeface="Times New Roman" pitchFamily="34" charset="-122"/>
-                <a:cs typeface="Times New Roman" pitchFamily="34" charset="-120"/>
-              </a:rPr>
-              <a:t>Teacher's Note</a:t>
-            </a:r>
-            <a:endParaRPr lang="en-US" sz="3600" dirty="0"/>
-          </a:p>
-        </p:txBody>
-      </p:sp>
-      <p:sp>
-        <p:nvSpPr>
-          <p:cNvPr id="5" name="Text 2"/>
-          <p:cNvSpPr/>
-          <p:nvPr/>
-        </p:nvSpPr>
-        <p:spPr>
-          <a:xfrm>
-            <a:off x="2697480" y="1783080"/>
-            <a:ext cx="9174175" cy="4663440"/>
-          </a:xfrm>
-          <a:prstGeom prst="rect">
-            <a:avLst/>
-          </a:prstGeom>
-          <a:noFill/>
-          <a:ln/>
-        </p:spPr>
-        <p:txBody>
-          <a:bodyPr wrap="square" lIns="0" tIns="0" rIns="0" bIns="0" rtlCol="0" anchor="t"/>
-          <a:lstStyle/>
-          <a:p>
-            <a:pPr algn="l" marL="342900" indent="-342900">
-              <a:spcAft>
-                <a:spcPts val="800"/>
-              </a:spcAft>
-              <a:buSzPct val="100000"/>
-              <a:buChar char="•"/>
-            </a:pPr>
-            <a:r>
-              <a:rPr lang="en-US" sz="2000" dirty="0">
-                <a:solidFill>
-                  <a:srgbClr val="111111"/>
-                </a:solidFill>
-                <a:latin typeface="Calibri" pitchFamily="34" charset="0"/>
-                <a:ea typeface="Calibri" pitchFamily="34" charset="-122"/>
-                <a:cs typeface="Calibri" pitchFamily="34" charset="-120"/>
-              </a:rPr>
-              <a:t>Timing: Homework correction, plan, objectives 8 min | Recall, situation, action 10 min | 5 activities 30 min | Board summary (copying) 30 min | Evaluation, remediation 10 min | Homework, next lesson 5 min | Logbook 7 min</a:t>
-            </a:r>
-            <a:endParaRPr lang="en-US" sz="2000" dirty="0"/>
-          </a:p>
-          <a:p>
-            <a:pPr algn="l" marL="342900" indent="-342900">
-              <a:spcAft>
-                <a:spcPts val="800"/>
-              </a:spcAft>
-              <a:buSzPct val="100000"/>
-              <a:buChar char="•"/>
-            </a:pPr>
-            <a:r>
-              <a:rPr lang="en-US" sz="2000" dirty="0">
-                <a:solidFill>
-                  <a:srgbClr val="111111"/>
-                </a:solidFill>
-                <a:latin typeface="Calibri" pitchFamily="34" charset="0"/>
-                <a:ea typeface="Calibri" pitchFamily="34" charset="-122"/>
-                <a:cs typeface="Calibri" pitchFamily="34" charset="-120"/>
-              </a:rPr>
-              <a:t>Without the projector (Activity 1): ask learners which crops their family grows.</a:t>
-            </a:r>
-            <a:endParaRPr lang="en-US" sz="2000" dirty="0"/>
-          </a:p>
-          <a:p>
-            <a:pPr algn="l" marL="342900" indent="-342900">
-              <a:spcAft>
-                <a:spcPts val="800"/>
-              </a:spcAft>
-              <a:buSzPct val="100000"/>
-              <a:buChar char="•"/>
-            </a:pPr>
-            <a:r>
-              <a:rPr lang="en-US" sz="2000" dirty="0">
-                <a:solidFill>
-                  <a:srgbClr val="111111"/>
-                </a:solidFill>
-                <a:latin typeface="Calibri" pitchFamily="34" charset="0"/>
-                <a:ea typeface="Calibri" pitchFamily="34" charset="-122"/>
-                <a:cs typeface="Calibri" pitchFamily="34" charset="-120"/>
-              </a:rPr>
-              <a:t>Without the projector (Activity 2): ask learners where cattle are sold in Garoua.</a:t>
-            </a:r>
-            <a:endParaRPr lang="en-US" sz="2000" dirty="0"/>
-          </a:p>
-          <a:p>
-            <a:pPr algn="l" marL="342900" indent="-342900">
-              <a:spcAft>
-                <a:spcPts val="800"/>
-              </a:spcAft>
-              <a:buSzPct val="100000"/>
-              <a:buChar char="•"/>
-            </a:pPr>
-            <a:r>
-              <a:rPr lang="en-US" sz="2000" dirty="0">
-                <a:solidFill>
-                  <a:srgbClr val="111111"/>
-                </a:solidFill>
-                <a:latin typeface="Calibri" pitchFamily="34" charset="0"/>
-                <a:ea typeface="Calibri" pitchFamily="34" charset="-122"/>
-                <a:cs typeface="Calibri" pitchFamily="34" charset="-120"/>
-              </a:rPr>
-              <a:t>Without the projector (Activity 3): ask learners where the fish of the Garoua market comes from.</a:t>
-            </a:r>
-            <a:endParaRPr lang="en-US" sz="2000" dirty="0"/>
-          </a:p>
-          <a:p>
-            <a:pPr algn="l" marL="342900" indent="-342900">
-              <a:spcAft>
-                <a:spcPts val="800"/>
-              </a:spcAft>
-              <a:buSzPct val="100000"/>
-              <a:buChar char="•"/>
-            </a:pPr>
-            <a:r>
-              <a:rPr lang="en-US" sz="2000" dirty="0">
-                <a:solidFill>
-                  <a:srgbClr val="111111"/>
-                </a:solidFill>
-                <a:latin typeface="Calibri" pitchFamily="34" charset="0"/>
-                <a:ea typeface="Calibri" pitchFamily="34" charset="-122"/>
-                <a:cs typeface="Calibri" pitchFamily="34" charset="-120"/>
-              </a:rPr>
-              <a:t>Without the projector (Activity 4): ask learners what wood is used for.</a:t>
-            </a:r>
-            <a:endParaRPr lang="en-US" sz="2000" dirty="0"/>
-          </a:p>
-          <a:p>
-            <a:pPr algn="l" marL="342900" indent="-342900">
-              <a:spcAft>
-                <a:spcPts val="800"/>
-              </a:spcAft>
-              <a:buSzPct val="100000"/>
-              <a:buChar char="•"/>
-            </a:pPr>
-            <a:r>
-              <a:rPr lang="en-US" sz="2000" dirty="0">
-                <a:solidFill>
-                  <a:srgbClr val="111111"/>
-                </a:solidFill>
-                <a:latin typeface="Calibri" pitchFamily="34" charset="0"/>
-                <a:ea typeface="Calibri" pitchFamily="34" charset="-122"/>
-                <a:cs typeface="Calibri" pitchFamily="34" charset="-120"/>
-              </a:rPr>
-              <a:t>Without the projector (Activity 5): name minerals of Cameroon: oil, gold, bauxite, limestone.</a:t>
-            </a:r>
-            <a:endParaRPr lang="en-US" sz="2000" dirty="0"/>
-          </a:p>
-        </p:txBody>
-      </p:sp>
-      <p:sp>
-        <p:nvSpPr>
-          <p:cNvPr id="25" name="Slide Number Placeholder 0"/>
-          <p:cNvSpPr>
-            <a:spLocks noGrp="1"/>
-          </p:cNvSpPr>
-          <p:nvPr>
-            <p:ph type="sldNum" sz="quarter" idx="4294967295"/>
-          </p:nvPr>
-        </p:nvSpPr>
-        <p:spPr>
-          <a:xfrm>
-            <a:off x="27432" y="91440"/>
-            <a:ext cx="585216" cy="475488"/>
-          </a:xfrm>
-          <a:prstGeom prst="rect">
-            <a:avLst/>
-          </a:prstGeom>
-          <a:extLst>
-            <a:ext uri="{C572A759-6A51-4108-AA02-DFA0A04FC94B}">
-              <ma14:wrappingTextBoxFlag xmlns:ma14="http://schemas.microsoft.com/office/mac/drawingml/2011/main" val="0"/>
-            </a:ext>
-          </a:extLst>
-        </p:spPr>
-        <p:txBody>
-          <a:bodyPr/>
-          <a:lstStyle>
-            <a:lvl1pPr>
-              <a:defRPr sz="2000">
-                <a:solidFill>
-                  <a:srgbClr val="FFFFFF"/>
-                </a:solidFill>
-                <a:latin typeface="Calibri"/>
-                <a:ea typeface="Calibri"/>
-                <a:cs typeface="Calibri"/>
-              </a:defRPr>
-            </a:lvl1pPr>
-          </a:lstStyle>
-          <a:p>
-            <a:pPr algn="ctr"/>
-            <a:fld id="{F7021451-1387-4CA6-816F-3879F97B5CBC}" type="slidenum">
-              <a:rPr b="1" lang="en-US"/>
               <a:t>49</a:t>
             </a:fld>
             <a:endParaRPr lang="en-US"/>
@@ -19912,7 +19912,7 @@
                 <a:ea typeface="Calibri" pitchFamily="34" charset="-122"/>
                 <a:cs typeface="Calibri" pitchFamily="34" charset="-120"/>
               </a:rPr>
-              <a:t>REFERENCES</a:t>
+              <a:t>TEACHER'S NOTE</a:t>
             </a:r>
             <a:endParaRPr lang="en-US" sz="1400" dirty="0"/>
           </a:p>
@@ -19935,7 +19935,7 @@
         <p:spPr>
           <a:xfrm>
             <a:off x="0" y="658368"/>
-            <a:ext cx="2468880" cy="5833872"/>
+            <a:ext cx="3840480" cy="5833872"/>
           </a:xfrm>
           <a:prstGeom prst="rect">
             <a:avLst/>
@@ -19950,8 +19950,8 @@
         </p:nvSpPr>
         <p:spPr>
           <a:xfrm>
-            <a:off x="2697480" y="1005840"/>
-            <a:ext cx="9174175" cy="731520"/>
+            <a:off x="4069080" y="1005840"/>
+            <a:ext cx="7802575" cy="731520"/>
           </a:xfrm>
           <a:prstGeom prst="rect">
             <a:avLst/>
@@ -19977,7 +19977,7 @@
                 <a:ea typeface="Times New Roman" pitchFamily="34" charset="-122"/>
                 <a:cs typeface="Times New Roman" pitchFamily="34" charset="-120"/>
               </a:rPr>
-              <a:t>References</a:t>
+              <a:t>Teacher's Note</a:t>
             </a:r>
             <a:endParaRPr lang="en-US" sz="3600" dirty="0"/>
           </a:p>
@@ -19991,8 +19991,8 @@
         </p:nvSpPr>
         <p:spPr>
           <a:xfrm>
-            <a:off x="2697480" y="1783080"/>
-            <a:ext cx="9174175" cy="4663440"/>
+            <a:off x="4069080" y="1783080"/>
+            <a:ext cx="7802575" cy="4663440"/>
           </a:xfrm>
           <a:prstGeom prst="rect">
             <a:avLst/>
@@ -20012,7 +20012,7 @@
               <a:buChar char="•"/>
             </a:pPr>
             <a:r>
-              <a:rPr lang="en-US" sz="1800" dirty="0">
+              <a:rPr lang="en-US" sz="2000" dirty="0">
                 <a:solidFill>
                   <a:srgbClr val="111111"/>
                 </a:solidFill>
@@ -20020,9 +20020,9 @@
                 <a:ea typeface="Calibri" pitchFamily="34" charset="-122"/>
                 <a:cs typeface="Calibri" pitchFamily="34" charset="-120"/>
               </a:rPr>
-              <a:t>Harmonised Progression Sheet, Economic Geography (5051), Form 2.</a:t>
-            </a:r>
-            <a:endParaRPr lang="en-US" sz="1800" dirty="0"/>
+              <a:t>Timing: Homework correction, plan, objectives 8 min | Recall, situation, action 10 min | 5 activities 30 min | Board summary (copying) 30 min | Evaluation, remediation 10 min | Homework, next lesson 5 min | Logbook 7 min</a:t>
+            </a:r>
+            <a:endParaRPr lang="en-US" sz="2000" dirty="0"/>
           </a:p>
           <a:p>
             <a:pPr algn="l" marL="342900" indent="-342900">
@@ -20033,7 +20033,7 @@
               <a:buChar char="•"/>
             </a:pPr>
             <a:r>
-              <a:rPr lang="en-US" sz="1800" dirty="0">
+              <a:rPr lang="en-US" sz="2000" dirty="0">
                 <a:solidFill>
                   <a:srgbClr val="111111"/>
                 </a:solidFill>
@@ -20041,9 +20041,9 @@
                 <a:ea typeface="Calibri" pitchFamily="34" charset="-122"/>
                 <a:cs typeface="Calibri" pitchFamily="34" charset="-120"/>
               </a:rPr>
-              <a:t>Photo, Activity 1: “Ghana 15” by CIAT International Center for Tropical Agriculture, CC BY-NC-SA 2.0, via Flickr (https://www.flickr.com/photos/38476503@N08/5207540264)</a:t>
-            </a:r>
-            <a:endParaRPr lang="en-US" sz="1800" dirty="0"/>
+              <a:t>Without the projector (Activity 1): name farmers in the family.</a:t>
+            </a:r>
+            <a:endParaRPr lang="en-US" sz="2000" dirty="0"/>
           </a:p>
           <a:p>
             <a:pPr algn="l" marL="342900" indent="-342900">
@@ -20054,7 +20054,7 @@
               <a:buChar char="•"/>
             </a:pPr>
             <a:r>
-              <a:rPr lang="en-US" sz="1800" dirty="0">
+              <a:rPr lang="en-US" sz="2000" dirty="0">
                 <a:solidFill>
                   <a:srgbClr val="111111"/>
                 </a:solidFill>
@@ -20062,9 +20062,9 @@
                 <a:ea typeface="Calibri" pitchFamily="34" charset="-122"/>
                 <a:cs typeface="Calibri" pitchFamily="34" charset="-120"/>
               </a:rPr>
-              <a:t>Photo, Activity 2: “Discussing the price” by 10b travelling / Carsten ten Brink, CC BY-NC-ND 2.0, via Flickr (https://www.flickr.com/photos/77334245@N00/7313656038)</a:t>
-            </a:r>
-            <a:endParaRPr lang="en-US" sz="1800" dirty="0"/>
+              <a:t>Without the projector (Activity 2): describe a cattle market.</a:t>
+            </a:r>
+            <a:endParaRPr lang="en-US" sz="2000" dirty="0"/>
           </a:p>
           <a:p>
             <a:pPr algn="l" marL="342900" indent="-342900">
@@ -20075,7 +20075,7 @@
               <a:buChar char="•"/>
             </a:pPr>
             <a:r>
-              <a:rPr lang="en-US" sz="1800" dirty="0">
+              <a:rPr lang="en-US" sz="2000" dirty="0">
                 <a:solidFill>
                   <a:srgbClr val="111111"/>
                 </a:solidFill>
@@ -20083,9 +20083,9 @@
                 <a:ea typeface="Calibri" pitchFamily="34" charset="-122"/>
                 <a:cs typeface="Calibri" pitchFamily="34" charset="-120"/>
               </a:rPr>
-              <a:t>Photo, Activity 3: “Kenyan food, farming and landscapes” by CGIAR Climate, CC BY-NC-SA 2.0, via Flickr (https://www.flickr.com/photos/55227776@N04/14310899853)</a:t>
-            </a:r>
-            <a:endParaRPr lang="en-US" sz="1800" dirty="0"/>
+              <a:t>Without the projector (Activity 3): name fish sold in Garoua.</a:t>
+            </a:r>
+            <a:endParaRPr lang="en-US" sz="2000" dirty="0"/>
           </a:p>
           <a:p>
             <a:pPr algn="l" marL="342900" indent="-342900">
@@ -20096,7 +20096,7 @@
               <a:buChar char="•"/>
             </a:pPr>
             <a:r>
-              <a:rPr lang="en-US" sz="1800" dirty="0">
+              <a:rPr lang="en-US" sz="2000" dirty="0">
                 <a:solidFill>
                   <a:srgbClr val="111111"/>
                 </a:solidFill>
@@ -20104,9 +20104,9 @@
                 <a:ea typeface="Calibri" pitchFamily="34" charset="-122"/>
                 <a:cs typeface="Calibri" pitchFamily="34" charset="-120"/>
               </a:rPr>
-              <a:t>Photo, Activity 4: “Logging truck, Cameroon” by World Resources, CC BY-NC-SA 2.0, via Flickr (https://www.flickr.com/photos/26107309@N05/4764354366)</a:t>
-            </a:r>
-            <a:endParaRPr lang="en-US" sz="1800" dirty="0"/>
+              <a:t>Without the projector (Activity 4): name wooden objects.</a:t>
+            </a:r>
+            <a:endParaRPr lang="en-US" sz="2000" dirty="0"/>
           </a:p>
           <a:p>
             <a:pPr algn="l" marL="342900" indent="-342900">
@@ -20117,7 +20117,7 @@
               <a:buChar char="•"/>
             </a:pPr>
             <a:r>
-              <a:rPr lang="en-US" sz="1800" dirty="0">
+              <a:rPr lang="en-US" sz="2000" dirty="0">
                 <a:solidFill>
                   <a:srgbClr val="111111"/>
                 </a:solidFill>
@@ -20125,10 +20125,209 @@
                 <a:ea typeface="Calibri" pitchFamily="34" charset="-122"/>
                 <a:cs typeface="Calibri" pitchFamily="34" charset="-120"/>
               </a:rPr>
-              <a:t>Photo, Activity 5: “Mining in Kailo” by Julien Harneis, CC BY-SA 2.0, via Flickr (https://www.flickr.com/photos/16935515@N00/1872000955)</a:t>
-            </a:r>
-            <a:endParaRPr lang="en-US" sz="1800" dirty="0"/>
-          </a:p>
+              <a:t>Without the projector (Activity 5): name minerals.</a:t>
+            </a:r>
+            <a:endParaRPr lang="en-US" sz="2000" dirty="0"/>
+          </a:p>
+        </p:txBody>
+      </p:sp>
+      <p:sp>
+        <p:nvSpPr>
+          <p:cNvPr id="25" name="Slide Number Placeholder 0"/>
+          <p:cNvSpPr>
+            <a:spLocks noGrp="1"/>
+          </p:cNvSpPr>
+          <p:nvPr>
+            <p:ph type="sldNum" sz="quarter" idx="4294967295"/>
+          </p:nvPr>
+        </p:nvSpPr>
+        <p:spPr>
+          <a:xfrm>
+            <a:off x="27432" y="91440"/>
+            <a:ext cx="585216" cy="475488"/>
+          </a:xfrm>
+          <a:prstGeom prst="rect">
+            <a:avLst/>
+          </a:prstGeom>
+          <a:extLst>
+            <a:ext uri="{C572A759-6A51-4108-AA02-DFA0A04FC94B}">
+              <ma14:wrappingTextBoxFlag xmlns:ma14="http://schemas.microsoft.com/office/mac/drawingml/2011/main" val="0"/>
+            </a:ext>
+          </a:extLst>
+        </p:spPr>
+        <p:txBody>
+          <a:bodyPr/>
+          <a:lstStyle>
+            <a:lvl1pPr>
+              <a:defRPr sz="2000">
+                <a:solidFill>
+                  <a:srgbClr val="FFFFFF"/>
+                </a:solidFill>
+                <a:latin typeface="Calibri"/>
+                <a:ea typeface="Calibri"/>
+                <a:cs typeface="Calibri"/>
+              </a:defRPr>
+            </a:lvl1pPr>
+          </a:lstStyle>
+          <a:p>
+            <a:pPr algn="ctr"/>
+            <a:fld id="{F7021451-1387-4CA6-816F-3879F97B5CBC}" type="slidenum">
+              <a:rPr b="1" lang="en-US"/>
+              <a:t>50</a:t>
+            </a:fld>
+            <a:endParaRPr lang="en-US"/>
+          </a:p>
+        </p:txBody>
+      </p:sp>
+    </p:spTree>
+  </p:cSld>
+  <p:clrMapOvr>
+    <a:masterClrMapping/>
+  </p:clrMapOvr>
+</p:sld>
+</file>
+
+<file path=ppt/slides/slide51.xml><?xml version="1.0" encoding="utf-8"?>
+<p:sld xmlns:a="http://schemas.openxmlformats.org/drawingml/2006/main" xmlns:r="http://schemas.openxmlformats.org/officeDocument/2006/relationships" xmlns:p="http://schemas.openxmlformats.org/presentationml/2006/main">
+  <p:cSld name="Slide 51">
+    <p:spTree>
+      <p:nvGrpSpPr>
+        <p:cNvPr id="1" name=""/>
+        <p:cNvGrpSpPr/>
+        <p:nvPr/>
+      </p:nvGrpSpPr>
+      <p:grpSpPr>
+        <a:xfrm>
+          <a:off x="0" y="0"/>
+          <a:ext cx="0" cy="0"/>
+          <a:chOff x="0" y="0"/>
+          <a:chExt cx="0" cy="0"/>
+        </a:xfrm>
+      </p:grpSpPr>
+      <p:sp>
+        <p:nvSpPr>
+          <p:cNvPr id="2" name="Text 0"/>
+          <p:cNvSpPr/>
+          <p:nvPr/>
+        </p:nvSpPr>
+        <p:spPr>
+          <a:xfrm>
+            <a:off x="457200" y="713232"/>
+            <a:ext cx="11368735" cy="274320"/>
+          </a:xfrm>
+          <a:prstGeom prst="rect">
+            <a:avLst/>
+          </a:prstGeom>
+          <a:noFill/>
+          <a:ln/>
+        </p:spPr>
+        <p:txBody>
+          <a:bodyPr wrap="square" lIns="0" tIns="0" rIns="0" bIns="0" rtlCol="0" anchor="ctr"/>
+          <a:lstStyle/>
+          <a:p>
+            <a:pPr algn="r" indent="0" marL="0">
+              <a:buNone/>
+            </a:pPr>
+            <a:r>
+              <a:rPr lang="en-US" sz="1400" b="1" dirty="0">
+                <a:solidFill>
+                  <a:srgbClr val="1C3F6E"/>
+                </a:solidFill>
+                <a:latin typeface="Calibri" pitchFamily="34" charset="0"/>
+                <a:ea typeface="Calibri" pitchFamily="34" charset="-122"/>
+                <a:cs typeface="Calibri" pitchFamily="34" charset="-120"/>
+              </a:rPr>
+              <a:t>REFERENCES</a:t>
+            </a:r>
+            <a:endParaRPr lang="en-US" sz="1400" dirty="0"/>
+          </a:p>
+        </p:txBody>
+      </p:sp>
+      <p:pic>
+        <p:nvPicPr>
+          <p:cNvPr id="3" name="Image 0" descr="/home/claude/f4/img/minesec_sheet.png">    </p:cNvPr>
+          <p:cNvPicPr>
+            <a:picLocks noChangeAspect="1"/>
+          </p:cNvPicPr>
+          <p:nvPr/>
+        </p:nvPicPr>
+        <p:blipFill>
+          <a:blip r:embed="rId1"/>
+          <a:stretch>
+            <a:fillRect/>
+          </a:stretch>
+        </p:blipFill>
+        <p:spPr>
+          <a:xfrm>
+            <a:off x="0" y="658368"/>
+            <a:ext cx="2468880" cy="5833872"/>
+          </a:xfrm>
+          <a:prstGeom prst="rect">
+            <a:avLst/>
+          </a:prstGeom>
+        </p:spPr>
+      </p:pic>
+      <p:sp>
+        <p:nvSpPr>
+          <p:cNvPr id="4" name="Text 1"/>
+          <p:cNvSpPr/>
+          <p:nvPr/>
+        </p:nvSpPr>
+        <p:spPr>
+          <a:xfrm>
+            <a:off x="2697480" y="1005840"/>
+            <a:ext cx="9174175" cy="731520"/>
+          </a:xfrm>
+          <a:prstGeom prst="rect">
+            <a:avLst/>
+          </a:prstGeom>
+          <a:noFill/>
+          <a:ln/>
+        </p:spPr>
+        <p:txBody>
+          <a:bodyPr wrap="square" lIns="0" tIns="0" rIns="0" bIns="0" rtlCol="0" anchor="ctr">
+            <a:normAutofit/>
+          </a:bodyPr>
+          <a:lstStyle/>
+          <a:p>
+            <a:pPr algn="ctr" indent="0" marL="0">
+              <a:buNone/>
+            </a:pPr>
+            <a:r>
+              <a:rPr lang="en-US" sz="3600" b="1" dirty="0">
+                <a:solidFill>
+                  <a:srgbClr val="990011"/>
+                </a:solidFill>
+                <a:latin typeface="Times New Roman" pitchFamily="34" charset="0"/>
+                <a:ea typeface="Times New Roman" pitchFamily="34" charset="-122"/>
+                <a:cs typeface="Times New Roman" pitchFamily="34" charset="-120"/>
+              </a:rPr>
+              <a:t>References</a:t>
+            </a:r>
+            <a:endParaRPr lang="en-US" sz="3600" dirty="0"/>
+          </a:p>
+        </p:txBody>
+      </p:sp>
+      <p:sp>
+        <p:nvSpPr>
+          <p:cNvPr id="5" name="Text 2"/>
+          <p:cNvSpPr/>
+          <p:nvPr/>
+        </p:nvSpPr>
+        <p:spPr>
+          <a:xfrm>
+            <a:off x="2697480" y="1783080"/>
+            <a:ext cx="9174175" cy="4663440"/>
+          </a:xfrm>
+          <a:prstGeom prst="rect">
+            <a:avLst/>
+          </a:prstGeom>
+          <a:noFill/>
+          <a:ln/>
+        </p:spPr>
+        <p:txBody>
+          <a:bodyPr wrap="square" lIns="0" tIns="0" rIns="0" bIns="0" rtlCol="0" anchor="t"/>
+          <a:lstStyle/>
           <a:p>
             <a:pPr algn="l" marL="342900" indent="-342900">
               <a:spcAft>
@@ -20146,6 +20345,132 @@
                 <a:ea typeface="Calibri" pitchFamily="34" charset="-122"/>
                 <a:cs typeface="Calibri" pitchFamily="34" charset="-120"/>
               </a:rPr>
+              <a:t>Harmonised Progression Sheet, Economic Geography (5051), Form 2.</a:t>
+            </a:r>
+            <a:endParaRPr lang="en-US" sz="1800" dirty="0"/>
+          </a:p>
+          <a:p>
+            <a:pPr algn="l" marL="342900" indent="-342900">
+              <a:spcAft>
+                <a:spcPts val="800"/>
+              </a:spcAft>
+              <a:buSzPct val="100000"/>
+              <a:buChar char="•"/>
+            </a:pPr>
+            <a:r>
+              <a:rPr lang="en-US" sz="1800" dirty="0">
+                <a:solidFill>
+                  <a:srgbClr val="111111"/>
+                </a:solidFill>
+                <a:latin typeface="Calibri" pitchFamily="34" charset="0"/>
+                <a:ea typeface="Calibri" pitchFamily="34" charset="-122"/>
+                <a:cs typeface="Calibri" pitchFamily="34" charset="-120"/>
+              </a:rPr>
+              <a:t>Photo, Activity 1: “Ghana 15” by CIAT International Center for Tropical Agriculture, CC BY-NC-SA 2.0, via Flickr (https://www.flickr.com/photos/38476503@N08/5207540264)</a:t>
+            </a:r>
+            <a:endParaRPr lang="en-US" sz="1800" dirty="0"/>
+          </a:p>
+          <a:p>
+            <a:pPr algn="l" marL="342900" indent="-342900">
+              <a:spcAft>
+                <a:spcPts val="800"/>
+              </a:spcAft>
+              <a:buSzPct val="100000"/>
+              <a:buChar char="•"/>
+            </a:pPr>
+            <a:r>
+              <a:rPr lang="en-US" sz="1800" dirty="0">
+                <a:solidFill>
+                  <a:srgbClr val="111111"/>
+                </a:solidFill>
+                <a:latin typeface="Calibri" pitchFamily="34" charset="0"/>
+                <a:ea typeface="Calibri" pitchFamily="34" charset="-122"/>
+                <a:cs typeface="Calibri" pitchFamily="34" charset="-120"/>
+              </a:rPr>
+              <a:t>Photo, Activity 2: “Discussing the price” by 10b travelling / Carsten ten Brink, CC BY-NC-ND 2.0, via Flickr (https://www.flickr.com/photos/77334245@N00/7313656038)</a:t>
+            </a:r>
+            <a:endParaRPr lang="en-US" sz="1800" dirty="0"/>
+          </a:p>
+          <a:p>
+            <a:pPr algn="l" marL="342900" indent="-342900">
+              <a:spcAft>
+                <a:spcPts val="800"/>
+              </a:spcAft>
+              <a:buSzPct val="100000"/>
+              <a:buChar char="•"/>
+            </a:pPr>
+            <a:r>
+              <a:rPr lang="en-US" sz="1800" dirty="0">
+                <a:solidFill>
+                  <a:srgbClr val="111111"/>
+                </a:solidFill>
+                <a:latin typeface="Calibri" pitchFamily="34" charset="0"/>
+                <a:ea typeface="Calibri" pitchFamily="34" charset="-122"/>
+                <a:cs typeface="Calibri" pitchFamily="34" charset="-120"/>
+              </a:rPr>
+              <a:t>Photo, Activity 3: “Kenyan food, farming and landscapes” by CGIAR Climate, CC BY-NC-SA 2.0, via Flickr (https://www.flickr.com/photos/55227776@N04/14310899853)</a:t>
+            </a:r>
+            <a:endParaRPr lang="en-US" sz="1800" dirty="0"/>
+          </a:p>
+          <a:p>
+            <a:pPr algn="l" marL="342900" indent="-342900">
+              <a:spcAft>
+                <a:spcPts val="800"/>
+              </a:spcAft>
+              <a:buSzPct val="100000"/>
+              <a:buChar char="•"/>
+            </a:pPr>
+            <a:r>
+              <a:rPr lang="en-US" sz="1800" dirty="0">
+                <a:solidFill>
+                  <a:srgbClr val="111111"/>
+                </a:solidFill>
+                <a:latin typeface="Calibri" pitchFamily="34" charset="0"/>
+                <a:ea typeface="Calibri" pitchFamily="34" charset="-122"/>
+                <a:cs typeface="Calibri" pitchFamily="34" charset="-120"/>
+              </a:rPr>
+              <a:t>Photo, Activity 4: “Logging truck, Cameroon” by World Resources, CC BY-NC-SA 2.0, via Flickr (https://www.flickr.com/photos/26107309@N05/4764354366)</a:t>
+            </a:r>
+            <a:endParaRPr lang="en-US" sz="1800" dirty="0"/>
+          </a:p>
+          <a:p>
+            <a:pPr algn="l" marL="342900" indent="-342900">
+              <a:spcAft>
+                <a:spcPts val="800"/>
+              </a:spcAft>
+              <a:buSzPct val="100000"/>
+              <a:buChar char="•"/>
+            </a:pPr>
+            <a:r>
+              <a:rPr lang="en-US" sz="1800" dirty="0">
+                <a:solidFill>
+                  <a:srgbClr val="111111"/>
+                </a:solidFill>
+                <a:latin typeface="Calibri" pitchFamily="34" charset="0"/>
+                <a:ea typeface="Calibri" pitchFamily="34" charset="-122"/>
+                <a:cs typeface="Calibri" pitchFamily="34" charset="-120"/>
+              </a:rPr>
+              <a:t>Photo, Activity 5: “Mining in Kailo” by Julien Harneis, CC BY-SA 2.0, via Flickr (https://www.flickr.com/photos/16935515@N00/1872000955)</a:t>
+            </a:r>
+            <a:endParaRPr lang="en-US" sz="1800" dirty="0"/>
+          </a:p>
+          <a:p>
+            <a:pPr algn="l" marL="342900" indent="-342900">
+              <a:spcAft>
+                <a:spcPts val="800"/>
+              </a:spcAft>
+              <a:buSzPct val="100000"/>
+              <a:buChar char="•"/>
+            </a:pPr>
+            <a:r>
+              <a:rPr lang="en-US" sz="1800" dirty="0">
+                <a:solidFill>
+                  <a:srgbClr val="111111"/>
+                </a:solidFill>
+                <a:latin typeface="Calibri" pitchFamily="34" charset="0"/>
+                <a:ea typeface="Calibri" pitchFamily="34" charset="-122"/>
+                <a:cs typeface="Calibri" pitchFamily="34" charset="-120"/>
+              </a:rPr>
               <a:t>Diagrams and animations: drawn for this lesson (Geography Department).</a:t>
             </a:r>
             <a:endParaRPr lang="en-US" sz="1800" dirty="0"/>
@@ -20194,7 +20519,7 @@
             <a:pPr algn="ctr"/>
             <a:fld id="{F7021451-1387-4CA6-816F-3879F97B5CBC}" type="slidenum">
               <a:rPr b="1" lang="en-US"/>
-              <a:t>50</a:t>
+              <a:t>51</a:t>
             </a:fld>
             <a:endParaRPr lang="en-US"/>
           </a:p>
@@ -21138,7 +21463,7 @@
         <p:spPr>
           <a:xfrm>
             <a:off x="0" y="658368"/>
-            <a:ext cx="5120640" cy="5833872"/>
+            <a:ext cx="2468880" cy="5833872"/>
           </a:xfrm>
           <a:prstGeom prst="rect">
             <a:avLst/>
@@ -21153,8 +21478,8 @@
         </p:nvSpPr>
         <p:spPr>
           <a:xfrm>
-            <a:off x="5349240" y="1005840"/>
-            <a:ext cx="6522415" cy="731520"/>
+            <a:off x="2697480" y="1005840"/>
+            <a:ext cx="9174175" cy="731520"/>
           </a:xfrm>
           <a:prstGeom prst="rect">
             <a:avLst/>
@@ -21194,8 +21519,8 @@
         </p:nvSpPr>
         <p:spPr>
           <a:xfrm>
-            <a:off x="5349240" y="1783080"/>
-            <a:ext cx="6522415" cy="4663440"/>
+            <a:off x="2697480" y="1783080"/>
+            <a:ext cx="9174175" cy="4663440"/>
           </a:xfrm>
           <a:prstGeom prst="rect">
             <a:avLst/>
@@ -21222,7 +21547,7 @@
                 <a:ea typeface="Times New Roman" pitchFamily="34" charset="-122"/>
                 <a:cs typeface="Times New Roman" pitchFamily="34" charset="-120"/>
               </a:rPr>
-              <a:t>In the Garoua market, Rahila sees maize from Pitoa, fish from the Lagdo lake, beef from the Adamawa and firewood from the bush. Her mother says, "All these come from nature."</a:t>
+              <a:t>In the Garoua market, Rahila sees maize from Pitoa, fish from the Lagdo lake, beef from the Adamawa and firewood from the bush. Her mother says: "All these come from nature." Rahila asks: "What do we call the work of taking things from nature?"</a:t>
             </a:r>
             <a:endParaRPr lang="en-US" sz="4000" dirty="0"/>
           </a:p>

--- a/lecons/F2T/22_S16_L5_P3_Primary_Sector.pptx
+++ b/lecons/F2T/22_S16_L5_P3_Primary_Sector.pptx
@@ -3456,7 +3456,7 @@
           <a:p>
             <a:r>
               <a:rPr lang="en-US" dirty="0"/>
-              <a:t>Before we start the new lesson, let us correct the homework I gave you at the end of Lesson 5 (Part 2): The Sectors of the Economy: Formal and Informal Sectors of the Economy. The question was: List four products of farming, fishing, forestry or mining found in the Garoua market, and say where each comes from. Take out your exercise books.</a:t>
+              <a:t>Before we start the new lesson, let us correct the homework I gave you at the end of Lesson 5 (Part 2): The Sectors of the Economy: Formal and Informal Sectors of the Economy. The question was: Give three primary activities. Take out your exercise books.</a:t>
             </a:r>
             <a:endParaRPr lang="en-US" dirty="0"/>
           </a:p>
@@ -3984,7 +3984,7 @@
           <a:p>
             <a:r>
               <a:rPr lang="en-US" dirty="0"/>
-              <a:t>For your homework: Find the names of two factories in Cameroon, and write what each one produces. We shall correct it at the beginning of our next lesson.</a:t>
+              <a:t>For your homework: Name one factory of Garoua and its product. We shall correct it at the beginning of our next lesson.</a:t>
             </a:r>
             <a:endParaRPr lang="en-US" dirty="0"/>
           </a:p>
@@ -4424,7 +4424,7 @@
           <a:p>
             <a:r>
               <a:rPr lang="en-US" dirty="0"/>
-              <a:t>Here is a good answer. Examples: onions and maize (farming, from Garoua and the Far North); fish (fishing, from Lagdo); charcoal and wood (forestry, from the savanna); salt or cement from limestone (mining, from Figuil). Compare it with your own answer and correct your work in red.</a:t>
+              <a:t>Here is a good answer. Farming, fishing and mining. Compare it with your own answer and correct your work in red.</a:t>
             </a:r>
             <a:endParaRPr lang="en-US" dirty="0"/>
           </a:p>
@@ -14831,7 +14831,7 @@
         <p:spPr>
           <a:xfrm>
             <a:off x="0" y="658368"/>
-            <a:ext cx="3840480" cy="5833872"/>
+            <a:ext cx="5120640" cy="5833872"/>
           </a:xfrm>
           <a:prstGeom prst="rect">
             <a:avLst/>
@@ -14846,8 +14846,8 @@
         </p:nvSpPr>
         <p:spPr>
           <a:xfrm>
-            <a:off x="4069080" y="1005840"/>
-            <a:ext cx="7802575" cy="731520"/>
+            <a:off x="5349240" y="1005840"/>
+            <a:ext cx="6522415" cy="731520"/>
           </a:xfrm>
           <a:prstGeom prst="rect">
             <a:avLst/>
@@ -14887,8 +14887,8 @@
         </p:nvSpPr>
         <p:spPr>
           <a:xfrm>
-            <a:off x="4069080" y="1783080"/>
-            <a:ext cx="7802575" cy="4663440"/>
+            <a:off x="5349240" y="1783080"/>
+            <a:ext cx="6522415" cy="4663440"/>
           </a:xfrm>
           <a:prstGeom prst="rect">
             <a:avLst/>
@@ -14935,7 +14935,7 @@
                 <a:ea typeface="Times New Roman" pitchFamily="34" charset="-122"/>
                 <a:cs typeface="Times New Roman" pitchFamily="34" charset="-120"/>
               </a:rPr>
-              <a:t>List four products of farming, fishing, forestry or mining found in the Garoua market, and say where each comes from.</a:t>
+              <a:t>Give three primary activities.</a:t>
             </a:r>
             <a:endParaRPr lang="en-US" sz="4000" dirty="0"/>
           </a:p>
@@ -16315,7 +16315,7 @@
                 <a:ea typeface="Times New Roman" pitchFamily="34" charset="-122"/>
                 <a:cs typeface="Times New Roman" pitchFamily="34" charset="-120"/>
               </a:rPr>
-              <a:t>Find the names of two factories in Cameroon, and write what each one produces.</a:t>
+              <a:t>Name one factory of Garoua and its product.</a:t>
             </a:r>
             <a:endParaRPr lang="en-US" sz="4000" dirty="0"/>
           </a:p>
@@ -19255,7 +19255,7 @@
                           <a:ea typeface="Calibri" pitchFamily="34" charset="-122"/>
                           <a:cs typeface="Calibri" pitchFamily="34" charset="-120"/>
                         </a:rPr>
-                        <a:t>Find the names of two factories in Cameroon, and write what each one produces.</a:t>
+                        <a:t>Name one factory of Garoua and its product.</a:t>
                       </a:r>
                       <a:endParaRPr lang="en-US" sz="1600" dirty="0">
                         <a:latin typeface="Calibri" charset="0"/>
@@ -19716,7 +19716,7 @@
         <p:spPr>
           <a:xfrm>
             <a:off x="0" y="658368"/>
-            <a:ext cx="3840480" cy="5833872"/>
+            <a:ext cx="5120640" cy="5833872"/>
           </a:xfrm>
           <a:prstGeom prst="rect">
             <a:avLst/>
@@ -19731,8 +19731,8 @@
         </p:nvSpPr>
         <p:spPr>
           <a:xfrm>
-            <a:off x="4069080" y="1005840"/>
-            <a:ext cx="7802575" cy="731520"/>
+            <a:off x="5349240" y="1005840"/>
+            <a:ext cx="6522415" cy="731520"/>
           </a:xfrm>
           <a:prstGeom prst="rect">
             <a:avLst/>
@@ -19772,8 +19772,8 @@
         </p:nvSpPr>
         <p:spPr>
           <a:xfrm>
-            <a:off x="4069080" y="1783080"/>
-            <a:ext cx="7802575" cy="4663440"/>
+            <a:off x="5349240" y="1783080"/>
+            <a:ext cx="6522415" cy="4663440"/>
           </a:xfrm>
           <a:prstGeom prst="rect">
             <a:avLst/>
@@ -19800,7 +19800,7 @@
                 <a:ea typeface="Times New Roman" pitchFamily="34" charset="-122"/>
                 <a:cs typeface="Times New Roman" pitchFamily="34" charset="-120"/>
               </a:rPr>
-              <a:t>Examples: onions and maize (farming, from Garoua and the Far North); fish (fishing, from Lagdo); charcoal and wood (forestry, from the savanna); salt or cement from limestone (mining, from Figuil).</a:t>
+              <a:t>Farming, fishing and mining.</a:t>
             </a:r>
             <a:endParaRPr lang="en-US" sz="4000" dirty="0"/>
           </a:p>
